--- a/backend/templates/pptx/minimal_elegant.pptx
+++ b/backend/templates/pptx/minimal_elegant.pptx
@@ -14,9 +14,19 @@
     <p:sldId id="262" r:id="rId8"/>
     <p:sldId id="263" r:id="rId9"/>
     <p:sldId id="264" r:id="rId10"/>
+    <p:sldId id="265" r:id="rId11"/>
+    <p:sldId id="266" r:id="rId12"/>
+    <p:sldId id="267" r:id="rId13"/>
+    <p:sldId id="268" r:id="rId14"/>
+    <p:sldId id="269" r:id="rId15"/>
+    <p:sldId id="270" r:id="rId16"/>
+    <p:sldId id="271" r:id="rId17"/>
+    <p:sldId id="272" r:id="rId18"/>
+    <p:sldId id="273" r:id="rId19"/>
+    <p:sldId id="274" r:id="rId20"/>
   </p:sldIdLst>
   <p:notesMasterIdLst>
-    <p:notesMasterId r:id="rId11"/>
+    <p:notesMasterId r:id="rId21"/>
   </p:notesMasterIdLst>
   <p:sldSz cx="12192000" cy="6858000"/>
   <p:notesSz cx="6858000" cy="12192000"/>
@@ -534,6 +544,886 @@
             <a:fld id="{F7021451-1387-4CA6-816F-3879F97B5CBC}" type="slidenum">
               <a:rPr lang="en-US"/>
               <a:t>1</a:t>
+            </a:fld>
+            <a:endParaRPr lang="en-US"/>
+          </a:p>
+        </p:txBody>
+      </p:sp>
+    </p:spTree>
+    <p:extLst>
+      <p:ext uri="{BB962C8B-B14F-4D97-AF65-F5344CB8AC3E}">
+        <p14:creationId xmlns:p14="http://schemas.microsoft.com/office/powerpoint/2010/main" val="1024086991"/>
+      </p:ext>
+    </p:extLst>
+  </p:cSld>
+  <p:clrMapOvr>
+    <a:masterClrMapping/>
+  </p:clrMapOvr>
+</p:notes>
+</file>
+
+<file path=ppt/notesSlides/notesSlide10.xml><?xml version="1.0" encoding="utf-8"?>
+<p:notes xmlns:a="http://schemas.openxmlformats.org/drawingml/2006/main" xmlns:r="http://schemas.openxmlformats.org/officeDocument/2006/relationships" xmlns:p="http://schemas.openxmlformats.org/presentationml/2006/main">
+  <p:cSld>
+    <p:spTree>
+      <p:nvGrpSpPr>
+        <p:cNvPr id="1" name=""/>
+        <p:cNvGrpSpPr/>
+        <p:nvPr/>
+      </p:nvGrpSpPr>
+      <p:grpSpPr>
+        <a:xfrm>
+          <a:off x="0" y="0"/>
+          <a:ext cx="0" cy="0"/>
+          <a:chOff x="0" y="0"/>
+          <a:chExt cx="0" cy="0"/>
+        </a:xfrm>
+      </p:grpSpPr>
+      <p:sp>
+        <p:nvSpPr>
+          <p:cNvPr id="2" name="Slide Image Placeholder 1"/>
+          <p:cNvSpPr>
+            <a:spLocks noGrp="1" noRot="1" noChangeAspect="1"/>
+          </p:cNvSpPr>
+          <p:nvPr>
+            <p:ph type="sldImg"/>
+          </p:nvPr>
+        </p:nvSpPr>
+        <p:spPr/>
+      </p:sp>
+      <p:sp>
+        <p:nvSpPr>
+          <p:cNvPr id="3" name="Notes Placeholder 2"/>
+          <p:cNvSpPr>
+            <a:spLocks noGrp="1"/>
+          </p:cNvSpPr>
+          <p:nvPr>
+            <p:ph type="body" idx="1"/>
+          </p:nvPr>
+        </p:nvSpPr>
+        <p:spPr/>
+        <p:txBody>
+          <a:bodyPr/>
+          <a:lstStyle/>
+          <a:p>
+            <a:r>
+              <a:rPr lang="en-US" dirty="0"/>
+              <a:t/>
+            </a:r>
+            <a:endParaRPr lang="en-US" dirty="0"/>
+          </a:p>
+        </p:txBody>
+      </p:sp>
+      <p:sp>
+        <p:nvSpPr>
+          <p:cNvPr id="4" name="Slide Number Placeholder 3"/>
+          <p:cNvSpPr>
+            <a:spLocks noGrp="1"/>
+          </p:cNvSpPr>
+          <p:nvPr>
+            <p:ph type="sldNum" sz="quarter" idx="10"/>
+          </p:nvPr>
+        </p:nvSpPr>
+        <p:spPr/>
+        <p:txBody>
+          <a:bodyPr/>
+          <a:lstStyle/>
+          <a:p>
+            <a:fld id="{F7021451-1387-4CA6-816F-3879F97B5CBC}" type="slidenum">
+              <a:rPr lang="en-US"/>
+              <a:t>10</a:t>
+            </a:fld>
+            <a:endParaRPr lang="en-US"/>
+          </a:p>
+        </p:txBody>
+      </p:sp>
+    </p:spTree>
+    <p:extLst>
+      <p:ext uri="{BB962C8B-B14F-4D97-AF65-F5344CB8AC3E}">
+        <p14:creationId xmlns:p14="http://schemas.microsoft.com/office/powerpoint/2010/main" val="1024086991"/>
+      </p:ext>
+    </p:extLst>
+  </p:cSld>
+  <p:clrMapOvr>
+    <a:masterClrMapping/>
+  </p:clrMapOvr>
+</p:notes>
+</file>
+
+<file path=ppt/notesSlides/notesSlide11.xml><?xml version="1.0" encoding="utf-8"?>
+<p:notes xmlns:a="http://schemas.openxmlformats.org/drawingml/2006/main" xmlns:r="http://schemas.openxmlformats.org/officeDocument/2006/relationships" xmlns:p="http://schemas.openxmlformats.org/presentationml/2006/main">
+  <p:cSld>
+    <p:spTree>
+      <p:nvGrpSpPr>
+        <p:cNvPr id="1" name=""/>
+        <p:cNvGrpSpPr/>
+        <p:nvPr/>
+      </p:nvGrpSpPr>
+      <p:grpSpPr>
+        <a:xfrm>
+          <a:off x="0" y="0"/>
+          <a:ext cx="0" cy="0"/>
+          <a:chOff x="0" y="0"/>
+          <a:chExt cx="0" cy="0"/>
+        </a:xfrm>
+      </p:grpSpPr>
+      <p:sp>
+        <p:nvSpPr>
+          <p:cNvPr id="2" name="Slide Image Placeholder 1"/>
+          <p:cNvSpPr>
+            <a:spLocks noGrp="1" noRot="1" noChangeAspect="1"/>
+          </p:cNvSpPr>
+          <p:nvPr>
+            <p:ph type="sldImg"/>
+          </p:nvPr>
+        </p:nvSpPr>
+        <p:spPr/>
+      </p:sp>
+      <p:sp>
+        <p:nvSpPr>
+          <p:cNvPr id="3" name="Notes Placeholder 2"/>
+          <p:cNvSpPr>
+            <a:spLocks noGrp="1"/>
+          </p:cNvSpPr>
+          <p:nvPr>
+            <p:ph type="body" idx="1"/>
+          </p:nvPr>
+        </p:nvSpPr>
+        <p:spPr/>
+        <p:txBody>
+          <a:bodyPr/>
+          <a:lstStyle/>
+          <a:p>
+            <a:r>
+              <a:rPr lang="en-US" dirty="0"/>
+              <a:t/>
+            </a:r>
+            <a:endParaRPr lang="en-US" dirty="0"/>
+          </a:p>
+        </p:txBody>
+      </p:sp>
+      <p:sp>
+        <p:nvSpPr>
+          <p:cNvPr id="4" name="Slide Number Placeholder 3"/>
+          <p:cNvSpPr>
+            <a:spLocks noGrp="1"/>
+          </p:cNvSpPr>
+          <p:nvPr>
+            <p:ph type="sldNum" sz="quarter" idx="10"/>
+          </p:nvPr>
+        </p:nvSpPr>
+        <p:spPr/>
+        <p:txBody>
+          <a:bodyPr/>
+          <a:lstStyle/>
+          <a:p>
+            <a:fld id="{F7021451-1387-4CA6-816F-3879F97B5CBC}" type="slidenum">
+              <a:rPr lang="en-US"/>
+              <a:t>11</a:t>
+            </a:fld>
+            <a:endParaRPr lang="en-US"/>
+          </a:p>
+        </p:txBody>
+      </p:sp>
+    </p:spTree>
+    <p:extLst>
+      <p:ext uri="{BB962C8B-B14F-4D97-AF65-F5344CB8AC3E}">
+        <p14:creationId xmlns:p14="http://schemas.microsoft.com/office/powerpoint/2010/main" val="1024086991"/>
+      </p:ext>
+    </p:extLst>
+  </p:cSld>
+  <p:clrMapOvr>
+    <a:masterClrMapping/>
+  </p:clrMapOvr>
+</p:notes>
+</file>
+
+<file path=ppt/notesSlides/notesSlide12.xml><?xml version="1.0" encoding="utf-8"?>
+<p:notes xmlns:a="http://schemas.openxmlformats.org/drawingml/2006/main" xmlns:r="http://schemas.openxmlformats.org/officeDocument/2006/relationships" xmlns:p="http://schemas.openxmlformats.org/presentationml/2006/main">
+  <p:cSld>
+    <p:spTree>
+      <p:nvGrpSpPr>
+        <p:cNvPr id="1" name=""/>
+        <p:cNvGrpSpPr/>
+        <p:nvPr/>
+      </p:nvGrpSpPr>
+      <p:grpSpPr>
+        <a:xfrm>
+          <a:off x="0" y="0"/>
+          <a:ext cx="0" cy="0"/>
+          <a:chOff x="0" y="0"/>
+          <a:chExt cx="0" cy="0"/>
+        </a:xfrm>
+      </p:grpSpPr>
+      <p:sp>
+        <p:nvSpPr>
+          <p:cNvPr id="2" name="Slide Image Placeholder 1"/>
+          <p:cNvSpPr>
+            <a:spLocks noGrp="1" noRot="1" noChangeAspect="1"/>
+          </p:cNvSpPr>
+          <p:nvPr>
+            <p:ph type="sldImg"/>
+          </p:nvPr>
+        </p:nvSpPr>
+        <p:spPr/>
+      </p:sp>
+      <p:sp>
+        <p:nvSpPr>
+          <p:cNvPr id="3" name="Notes Placeholder 2"/>
+          <p:cNvSpPr>
+            <a:spLocks noGrp="1"/>
+          </p:cNvSpPr>
+          <p:nvPr>
+            <p:ph type="body" idx="1"/>
+          </p:nvPr>
+        </p:nvSpPr>
+        <p:spPr/>
+        <p:txBody>
+          <a:bodyPr/>
+          <a:lstStyle/>
+          <a:p>
+            <a:r>
+              <a:rPr lang="en-US" dirty="0"/>
+              <a:t/>
+            </a:r>
+            <a:endParaRPr lang="en-US" dirty="0"/>
+          </a:p>
+        </p:txBody>
+      </p:sp>
+      <p:sp>
+        <p:nvSpPr>
+          <p:cNvPr id="4" name="Slide Number Placeholder 3"/>
+          <p:cNvSpPr>
+            <a:spLocks noGrp="1"/>
+          </p:cNvSpPr>
+          <p:nvPr>
+            <p:ph type="sldNum" sz="quarter" idx="10"/>
+          </p:nvPr>
+        </p:nvSpPr>
+        <p:spPr/>
+        <p:txBody>
+          <a:bodyPr/>
+          <a:lstStyle/>
+          <a:p>
+            <a:fld id="{F7021451-1387-4CA6-816F-3879F97B5CBC}" type="slidenum">
+              <a:rPr lang="en-US"/>
+              <a:t>12</a:t>
+            </a:fld>
+            <a:endParaRPr lang="en-US"/>
+          </a:p>
+        </p:txBody>
+      </p:sp>
+    </p:spTree>
+    <p:extLst>
+      <p:ext uri="{BB962C8B-B14F-4D97-AF65-F5344CB8AC3E}">
+        <p14:creationId xmlns:p14="http://schemas.microsoft.com/office/powerpoint/2010/main" val="1024086991"/>
+      </p:ext>
+    </p:extLst>
+  </p:cSld>
+  <p:clrMapOvr>
+    <a:masterClrMapping/>
+  </p:clrMapOvr>
+</p:notes>
+</file>
+
+<file path=ppt/notesSlides/notesSlide13.xml><?xml version="1.0" encoding="utf-8"?>
+<p:notes xmlns:a="http://schemas.openxmlformats.org/drawingml/2006/main" xmlns:r="http://schemas.openxmlformats.org/officeDocument/2006/relationships" xmlns:p="http://schemas.openxmlformats.org/presentationml/2006/main">
+  <p:cSld>
+    <p:spTree>
+      <p:nvGrpSpPr>
+        <p:cNvPr id="1" name=""/>
+        <p:cNvGrpSpPr/>
+        <p:nvPr/>
+      </p:nvGrpSpPr>
+      <p:grpSpPr>
+        <a:xfrm>
+          <a:off x="0" y="0"/>
+          <a:ext cx="0" cy="0"/>
+          <a:chOff x="0" y="0"/>
+          <a:chExt cx="0" cy="0"/>
+        </a:xfrm>
+      </p:grpSpPr>
+      <p:sp>
+        <p:nvSpPr>
+          <p:cNvPr id="2" name="Slide Image Placeholder 1"/>
+          <p:cNvSpPr>
+            <a:spLocks noGrp="1" noRot="1" noChangeAspect="1"/>
+          </p:cNvSpPr>
+          <p:nvPr>
+            <p:ph type="sldImg"/>
+          </p:nvPr>
+        </p:nvSpPr>
+        <p:spPr/>
+      </p:sp>
+      <p:sp>
+        <p:nvSpPr>
+          <p:cNvPr id="3" name="Notes Placeholder 2"/>
+          <p:cNvSpPr>
+            <a:spLocks noGrp="1"/>
+          </p:cNvSpPr>
+          <p:nvPr>
+            <p:ph type="body" idx="1"/>
+          </p:nvPr>
+        </p:nvSpPr>
+        <p:spPr/>
+        <p:txBody>
+          <a:bodyPr/>
+          <a:lstStyle/>
+          <a:p>
+            <a:r>
+              <a:rPr lang="en-US" dirty="0"/>
+              <a:t/>
+            </a:r>
+            <a:endParaRPr lang="en-US" dirty="0"/>
+          </a:p>
+        </p:txBody>
+      </p:sp>
+      <p:sp>
+        <p:nvSpPr>
+          <p:cNvPr id="4" name="Slide Number Placeholder 3"/>
+          <p:cNvSpPr>
+            <a:spLocks noGrp="1"/>
+          </p:cNvSpPr>
+          <p:nvPr>
+            <p:ph type="sldNum" sz="quarter" idx="10"/>
+          </p:nvPr>
+        </p:nvSpPr>
+        <p:spPr/>
+        <p:txBody>
+          <a:bodyPr/>
+          <a:lstStyle/>
+          <a:p>
+            <a:fld id="{F7021451-1387-4CA6-816F-3879F97B5CBC}" type="slidenum">
+              <a:rPr lang="en-US"/>
+              <a:t>13</a:t>
+            </a:fld>
+            <a:endParaRPr lang="en-US"/>
+          </a:p>
+        </p:txBody>
+      </p:sp>
+    </p:spTree>
+    <p:extLst>
+      <p:ext uri="{BB962C8B-B14F-4D97-AF65-F5344CB8AC3E}">
+        <p14:creationId xmlns:p14="http://schemas.microsoft.com/office/powerpoint/2010/main" val="1024086991"/>
+      </p:ext>
+    </p:extLst>
+  </p:cSld>
+  <p:clrMapOvr>
+    <a:masterClrMapping/>
+  </p:clrMapOvr>
+</p:notes>
+</file>
+
+<file path=ppt/notesSlides/notesSlide14.xml><?xml version="1.0" encoding="utf-8"?>
+<p:notes xmlns:a="http://schemas.openxmlformats.org/drawingml/2006/main" xmlns:r="http://schemas.openxmlformats.org/officeDocument/2006/relationships" xmlns:p="http://schemas.openxmlformats.org/presentationml/2006/main">
+  <p:cSld>
+    <p:spTree>
+      <p:nvGrpSpPr>
+        <p:cNvPr id="1" name=""/>
+        <p:cNvGrpSpPr/>
+        <p:nvPr/>
+      </p:nvGrpSpPr>
+      <p:grpSpPr>
+        <a:xfrm>
+          <a:off x="0" y="0"/>
+          <a:ext cx="0" cy="0"/>
+          <a:chOff x="0" y="0"/>
+          <a:chExt cx="0" cy="0"/>
+        </a:xfrm>
+      </p:grpSpPr>
+      <p:sp>
+        <p:nvSpPr>
+          <p:cNvPr id="2" name="Slide Image Placeholder 1"/>
+          <p:cNvSpPr>
+            <a:spLocks noGrp="1" noRot="1" noChangeAspect="1"/>
+          </p:cNvSpPr>
+          <p:nvPr>
+            <p:ph type="sldImg"/>
+          </p:nvPr>
+        </p:nvSpPr>
+        <p:spPr/>
+      </p:sp>
+      <p:sp>
+        <p:nvSpPr>
+          <p:cNvPr id="3" name="Notes Placeholder 2"/>
+          <p:cNvSpPr>
+            <a:spLocks noGrp="1"/>
+          </p:cNvSpPr>
+          <p:nvPr>
+            <p:ph type="body" idx="1"/>
+          </p:nvPr>
+        </p:nvSpPr>
+        <p:spPr/>
+        <p:txBody>
+          <a:bodyPr/>
+          <a:lstStyle/>
+          <a:p>
+            <a:r>
+              <a:rPr lang="en-US" dirty="0"/>
+              <a:t/>
+            </a:r>
+            <a:endParaRPr lang="en-US" dirty="0"/>
+          </a:p>
+        </p:txBody>
+      </p:sp>
+      <p:sp>
+        <p:nvSpPr>
+          <p:cNvPr id="4" name="Slide Number Placeholder 3"/>
+          <p:cNvSpPr>
+            <a:spLocks noGrp="1"/>
+          </p:cNvSpPr>
+          <p:nvPr>
+            <p:ph type="sldNum" sz="quarter" idx="10"/>
+          </p:nvPr>
+        </p:nvSpPr>
+        <p:spPr/>
+        <p:txBody>
+          <a:bodyPr/>
+          <a:lstStyle/>
+          <a:p>
+            <a:fld id="{F7021451-1387-4CA6-816F-3879F97B5CBC}" type="slidenum">
+              <a:rPr lang="en-US"/>
+              <a:t>14</a:t>
+            </a:fld>
+            <a:endParaRPr lang="en-US"/>
+          </a:p>
+        </p:txBody>
+      </p:sp>
+    </p:spTree>
+    <p:extLst>
+      <p:ext uri="{BB962C8B-B14F-4D97-AF65-F5344CB8AC3E}">
+        <p14:creationId xmlns:p14="http://schemas.microsoft.com/office/powerpoint/2010/main" val="1024086991"/>
+      </p:ext>
+    </p:extLst>
+  </p:cSld>
+  <p:clrMapOvr>
+    <a:masterClrMapping/>
+  </p:clrMapOvr>
+</p:notes>
+</file>
+
+<file path=ppt/notesSlides/notesSlide15.xml><?xml version="1.0" encoding="utf-8"?>
+<p:notes xmlns:a="http://schemas.openxmlformats.org/drawingml/2006/main" xmlns:r="http://schemas.openxmlformats.org/officeDocument/2006/relationships" xmlns:p="http://schemas.openxmlformats.org/presentationml/2006/main">
+  <p:cSld>
+    <p:spTree>
+      <p:nvGrpSpPr>
+        <p:cNvPr id="1" name=""/>
+        <p:cNvGrpSpPr/>
+        <p:nvPr/>
+      </p:nvGrpSpPr>
+      <p:grpSpPr>
+        <a:xfrm>
+          <a:off x="0" y="0"/>
+          <a:ext cx="0" cy="0"/>
+          <a:chOff x="0" y="0"/>
+          <a:chExt cx="0" cy="0"/>
+        </a:xfrm>
+      </p:grpSpPr>
+      <p:sp>
+        <p:nvSpPr>
+          <p:cNvPr id="2" name="Slide Image Placeholder 1"/>
+          <p:cNvSpPr>
+            <a:spLocks noGrp="1" noRot="1" noChangeAspect="1"/>
+          </p:cNvSpPr>
+          <p:nvPr>
+            <p:ph type="sldImg"/>
+          </p:nvPr>
+        </p:nvSpPr>
+        <p:spPr/>
+      </p:sp>
+      <p:sp>
+        <p:nvSpPr>
+          <p:cNvPr id="3" name="Notes Placeholder 2"/>
+          <p:cNvSpPr>
+            <a:spLocks noGrp="1"/>
+          </p:cNvSpPr>
+          <p:nvPr>
+            <p:ph type="body" idx="1"/>
+          </p:nvPr>
+        </p:nvSpPr>
+        <p:spPr/>
+        <p:txBody>
+          <a:bodyPr/>
+          <a:lstStyle/>
+          <a:p>
+            <a:r>
+              <a:rPr lang="en-US" dirty="0"/>
+              <a:t/>
+            </a:r>
+            <a:endParaRPr lang="en-US" dirty="0"/>
+          </a:p>
+        </p:txBody>
+      </p:sp>
+      <p:sp>
+        <p:nvSpPr>
+          <p:cNvPr id="4" name="Slide Number Placeholder 3"/>
+          <p:cNvSpPr>
+            <a:spLocks noGrp="1"/>
+          </p:cNvSpPr>
+          <p:nvPr>
+            <p:ph type="sldNum" sz="quarter" idx="10"/>
+          </p:nvPr>
+        </p:nvSpPr>
+        <p:spPr/>
+        <p:txBody>
+          <a:bodyPr/>
+          <a:lstStyle/>
+          <a:p>
+            <a:fld id="{F7021451-1387-4CA6-816F-3879F97B5CBC}" type="slidenum">
+              <a:rPr lang="en-US"/>
+              <a:t>15</a:t>
+            </a:fld>
+            <a:endParaRPr lang="en-US"/>
+          </a:p>
+        </p:txBody>
+      </p:sp>
+    </p:spTree>
+    <p:extLst>
+      <p:ext uri="{BB962C8B-B14F-4D97-AF65-F5344CB8AC3E}">
+        <p14:creationId xmlns:p14="http://schemas.microsoft.com/office/powerpoint/2010/main" val="1024086991"/>
+      </p:ext>
+    </p:extLst>
+  </p:cSld>
+  <p:clrMapOvr>
+    <a:masterClrMapping/>
+  </p:clrMapOvr>
+</p:notes>
+</file>
+
+<file path=ppt/notesSlides/notesSlide16.xml><?xml version="1.0" encoding="utf-8"?>
+<p:notes xmlns:a="http://schemas.openxmlformats.org/drawingml/2006/main" xmlns:r="http://schemas.openxmlformats.org/officeDocument/2006/relationships" xmlns:p="http://schemas.openxmlformats.org/presentationml/2006/main">
+  <p:cSld>
+    <p:spTree>
+      <p:nvGrpSpPr>
+        <p:cNvPr id="1" name=""/>
+        <p:cNvGrpSpPr/>
+        <p:nvPr/>
+      </p:nvGrpSpPr>
+      <p:grpSpPr>
+        <a:xfrm>
+          <a:off x="0" y="0"/>
+          <a:ext cx="0" cy="0"/>
+          <a:chOff x="0" y="0"/>
+          <a:chExt cx="0" cy="0"/>
+        </a:xfrm>
+      </p:grpSpPr>
+      <p:sp>
+        <p:nvSpPr>
+          <p:cNvPr id="2" name="Slide Image Placeholder 1"/>
+          <p:cNvSpPr>
+            <a:spLocks noGrp="1" noRot="1" noChangeAspect="1"/>
+          </p:cNvSpPr>
+          <p:nvPr>
+            <p:ph type="sldImg"/>
+          </p:nvPr>
+        </p:nvSpPr>
+        <p:spPr/>
+      </p:sp>
+      <p:sp>
+        <p:nvSpPr>
+          <p:cNvPr id="3" name="Notes Placeholder 2"/>
+          <p:cNvSpPr>
+            <a:spLocks noGrp="1"/>
+          </p:cNvSpPr>
+          <p:nvPr>
+            <p:ph type="body" idx="1"/>
+          </p:nvPr>
+        </p:nvSpPr>
+        <p:spPr/>
+        <p:txBody>
+          <a:bodyPr/>
+          <a:lstStyle/>
+          <a:p>
+            <a:r>
+              <a:rPr lang="en-US" dirty="0"/>
+              <a:t/>
+            </a:r>
+            <a:endParaRPr lang="en-US" dirty="0"/>
+          </a:p>
+        </p:txBody>
+      </p:sp>
+      <p:sp>
+        <p:nvSpPr>
+          <p:cNvPr id="4" name="Slide Number Placeholder 3"/>
+          <p:cNvSpPr>
+            <a:spLocks noGrp="1"/>
+          </p:cNvSpPr>
+          <p:nvPr>
+            <p:ph type="sldNum" sz="quarter" idx="10"/>
+          </p:nvPr>
+        </p:nvSpPr>
+        <p:spPr/>
+        <p:txBody>
+          <a:bodyPr/>
+          <a:lstStyle/>
+          <a:p>
+            <a:fld id="{F7021451-1387-4CA6-816F-3879F97B5CBC}" type="slidenum">
+              <a:rPr lang="en-US"/>
+              <a:t>16</a:t>
+            </a:fld>
+            <a:endParaRPr lang="en-US"/>
+          </a:p>
+        </p:txBody>
+      </p:sp>
+    </p:spTree>
+    <p:extLst>
+      <p:ext uri="{BB962C8B-B14F-4D97-AF65-F5344CB8AC3E}">
+        <p14:creationId xmlns:p14="http://schemas.microsoft.com/office/powerpoint/2010/main" val="1024086991"/>
+      </p:ext>
+    </p:extLst>
+  </p:cSld>
+  <p:clrMapOvr>
+    <a:masterClrMapping/>
+  </p:clrMapOvr>
+</p:notes>
+</file>
+
+<file path=ppt/notesSlides/notesSlide17.xml><?xml version="1.0" encoding="utf-8"?>
+<p:notes xmlns:a="http://schemas.openxmlformats.org/drawingml/2006/main" xmlns:r="http://schemas.openxmlformats.org/officeDocument/2006/relationships" xmlns:p="http://schemas.openxmlformats.org/presentationml/2006/main">
+  <p:cSld>
+    <p:spTree>
+      <p:nvGrpSpPr>
+        <p:cNvPr id="1" name=""/>
+        <p:cNvGrpSpPr/>
+        <p:nvPr/>
+      </p:nvGrpSpPr>
+      <p:grpSpPr>
+        <a:xfrm>
+          <a:off x="0" y="0"/>
+          <a:ext cx="0" cy="0"/>
+          <a:chOff x="0" y="0"/>
+          <a:chExt cx="0" cy="0"/>
+        </a:xfrm>
+      </p:grpSpPr>
+      <p:sp>
+        <p:nvSpPr>
+          <p:cNvPr id="2" name="Slide Image Placeholder 1"/>
+          <p:cNvSpPr>
+            <a:spLocks noGrp="1" noRot="1" noChangeAspect="1"/>
+          </p:cNvSpPr>
+          <p:nvPr>
+            <p:ph type="sldImg"/>
+          </p:nvPr>
+        </p:nvSpPr>
+        <p:spPr/>
+      </p:sp>
+      <p:sp>
+        <p:nvSpPr>
+          <p:cNvPr id="3" name="Notes Placeholder 2"/>
+          <p:cNvSpPr>
+            <a:spLocks noGrp="1"/>
+          </p:cNvSpPr>
+          <p:nvPr>
+            <p:ph type="body" idx="1"/>
+          </p:nvPr>
+        </p:nvSpPr>
+        <p:spPr/>
+        <p:txBody>
+          <a:bodyPr/>
+          <a:lstStyle/>
+          <a:p>
+            <a:r>
+              <a:rPr lang="en-US" dirty="0"/>
+              <a:t/>
+            </a:r>
+            <a:endParaRPr lang="en-US" dirty="0"/>
+          </a:p>
+        </p:txBody>
+      </p:sp>
+      <p:sp>
+        <p:nvSpPr>
+          <p:cNvPr id="4" name="Slide Number Placeholder 3"/>
+          <p:cNvSpPr>
+            <a:spLocks noGrp="1"/>
+          </p:cNvSpPr>
+          <p:nvPr>
+            <p:ph type="sldNum" sz="quarter" idx="10"/>
+          </p:nvPr>
+        </p:nvSpPr>
+        <p:spPr/>
+        <p:txBody>
+          <a:bodyPr/>
+          <a:lstStyle/>
+          <a:p>
+            <a:fld id="{F7021451-1387-4CA6-816F-3879F97B5CBC}" type="slidenum">
+              <a:rPr lang="en-US"/>
+              <a:t>17</a:t>
+            </a:fld>
+            <a:endParaRPr lang="en-US"/>
+          </a:p>
+        </p:txBody>
+      </p:sp>
+    </p:spTree>
+    <p:extLst>
+      <p:ext uri="{BB962C8B-B14F-4D97-AF65-F5344CB8AC3E}">
+        <p14:creationId xmlns:p14="http://schemas.microsoft.com/office/powerpoint/2010/main" val="1024086991"/>
+      </p:ext>
+    </p:extLst>
+  </p:cSld>
+  <p:clrMapOvr>
+    <a:masterClrMapping/>
+  </p:clrMapOvr>
+</p:notes>
+</file>
+
+<file path=ppt/notesSlides/notesSlide18.xml><?xml version="1.0" encoding="utf-8"?>
+<p:notes xmlns:a="http://schemas.openxmlformats.org/drawingml/2006/main" xmlns:r="http://schemas.openxmlformats.org/officeDocument/2006/relationships" xmlns:p="http://schemas.openxmlformats.org/presentationml/2006/main">
+  <p:cSld>
+    <p:spTree>
+      <p:nvGrpSpPr>
+        <p:cNvPr id="1" name=""/>
+        <p:cNvGrpSpPr/>
+        <p:nvPr/>
+      </p:nvGrpSpPr>
+      <p:grpSpPr>
+        <a:xfrm>
+          <a:off x="0" y="0"/>
+          <a:ext cx="0" cy="0"/>
+          <a:chOff x="0" y="0"/>
+          <a:chExt cx="0" cy="0"/>
+        </a:xfrm>
+      </p:grpSpPr>
+      <p:sp>
+        <p:nvSpPr>
+          <p:cNvPr id="2" name="Slide Image Placeholder 1"/>
+          <p:cNvSpPr>
+            <a:spLocks noGrp="1" noRot="1" noChangeAspect="1"/>
+          </p:cNvSpPr>
+          <p:nvPr>
+            <p:ph type="sldImg"/>
+          </p:nvPr>
+        </p:nvSpPr>
+        <p:spPr/>
+      </p:sp>
+      <p:sp>
+        <p:nvSpPr>
+          <p:cNvPr id="3" name="Notes Placeholder 2"/>
+          <p:cNvSpPr>
+            <a:spLocks noGrp="1"/>
+          </p:cNvSpPr>
+          <p:nvPr>
+            <p:ph type="body" idx="1"/>
+          </p:nvPr>
+        </p:nvSpPr>
+        <p:spPr/>
+        <p:txBody>
+          <a:bodyPr/>
+          <a:lstStyle/>
+          <a:p>
+            <a:r>
+              <a:rPr lang="en-US" dirty="0"/>
+              <a:t/>
+            </a:r>
+            <a:endParaRPr lang="en-US" dirty="0"/>
+          </a:p>
+        </p:txBody>
+      </p:sp>
+      <p:sp>
+        <p:nvSpPr>
+          <p:cNvPr id="4" name="Slide Number Placeholder 3"/>
+          <p:cNvSpPr>
+            <a:spLocks noGrp="1"/>
+          </p:cNvSpPr>
+          <p:nvPr>
+            <p:ph type="sldNum" sz="quarter" idx="10"/>
+          </p:nvPr>
+        </p:nvSpPr>
+        <p:spPr/>
+        <p:txBody>
+          <a:bodyPr/>
+          <a:lstStyle/>
+          <a:p>
+            <a:fld id="{F7021451-1387-4CA6-816F-3879F97B5CBC}" type="slidenum">
+              <a:rPr lang="en-US"/>
+              <a:t>18</a:t>
+            </a:fld>
+            <a:endParaRPr lang="en-US"/>
+          </a:p>
+        </p:txBody>
+      </p:sp>
+    </p:spTree>
+    <p:extLst>
+      <p:ext uri="{BB962C8B-B14F-4D97-AF65-F5344CB8AC3E}">
+        <p14:creationId xmlns:p14="http://schemas.microsoft.com/office/powerpoint/2010/main" val="1024086991"/>
+      </p:ext>
+    </p:extLst>
+  </p:cSld>
+  <p:clrMapOvr>
+    <a:masterClrMapping/>
+  </p:clrMapOvr>
+</p:notes>
+</file>
+
+<file path=ppt/notesSlides/notesSlide19.xml><?xml version="1.0" encoding="utf-8"?>
+<p:notes xmlns:a="http://schemas.openxmlformats.org/drawingml/2006/main" xmlns:r="http://schemas.openxmlformats.org/officeDocument/2006/relationships" xmlns:p="http://schemas.openxmlformats.org/presentationml/2006/main">
+  <p:cSld>
+    <p:spTree>
+      <p:nvGrpSpPr>
+        <p:cNvPr id="1" name=""/>
+        <p:cNvGrpSpPr/>
+        <p:nvPr/>
+      </p:nvGrpSpPr>
+      <p:grpSpPr>
+        <a:xfrm>
+          <a:off x="0" y="0"/>
+          <a:ext cx="0" cy="0"/>
+          <a:chOff x="0" y="0"/>
+          <a:chExt cx="0" cy="0"/>
+        </a:xfrm>
+      </p:grpSpPr>
+      <p:sp>
+        <p:nvSpPr>
+          <p:cNvPr id="2" name="Slide Image Placeholder 1"/>
+          <p:cNvSpPr>
+            <a:spLocks noGrp="1" noRot="1" noChangeAspect="1"/>
+          </p:cNvSpPr>
+          <p:nvPr>
+            <p:ph type="sldImg"/>
+          </p:nvPr>
+        </p:nvSpPr>
+        <p:spPr/>
+      </p:sp>
+      <p:sp>
+        <p:nvSpPr>
+          <p:cNvPr id="3" name="Notes Placeholder 2"/>
+          <p:cNvSpPr>
+            <a:spLocks noGrp="1"/>
+          </p:cNvSpPr>
+          <p:nvPr>
+            <p:ph type="body" idx="1"/>
+          </p:nvPr>
+        </p:nvSpPr>
+        <p:spPr/>
+        <p:txBody>
+          <a:bodyPr/>
+          <a:lstStyle/>
+          <a:p>
+            <a:r>
+              <a:rPr lang="en-US" dirty="0"/>
+              <a:t/>
+            </a:r>
+            <a:endParaRPr lang="en-US" dirty="0"/>
+          </a:p>
+        </p:txBody>
+      </p:sp>
+      <p:sp>
+        <p:nvSpPr>
+          <p:cNvPr id="4" name="Slide Number Placeholder 3"/>
+          <p:cNvSpPr>
+            <a:spLocks noGrp="1"/>
+          </p:cNvSpPr>
+          <p:nvPr>
+            <p:ph type="sldNum" sz="quarter" idx="10"/>
+          </p:nvPr>
+        </p:nvSpPr>
+        <p:spPr/>
+        <p:txBody>
+          <a:bodyPr/>
+          <a:lstStyle/>
+          <a:p>
+            <a:fld id="{F7021451-1387-4CA6-816F-3879F97B5CBC}" type="slidenum">
+              <a:rPr lang="en-US"/>
+              <a:t>19</a:t>
             </a:fld>
             <a:endParaRPr lang="en-US"/>
           </a:p>
@@ -1849,6 +2739,2843 @@
 </p:sld>
 </file>
 
+<file path=ppt/slides/slide10.xml><?xml version="1.0" encoding="utf-8"?>
+<p:sld xmlns:a="http://schemas.openxmlformats.org/drawingml/2006/main" xmlns:r="http://schemas.openxmlformats.org/officeDocument/2006/relationships" xmlns:p="http://schemas.openxmlformats.org/presentationml/2006/main">
+  <p:cSld name="Slide 10">
+    <p:bg>
+      <p:bgPr>
+        <a:solidFill>
+          <a:srgbClr val="FFFFFF"/>
+        </a:solidFill>
+      </p:bgPr>
+    </p:bg>
+    <p:spTree>
+      <p:nvGrpSpPr>
+        <p:cNvPr id="1" name=""/>
+        <p:cNvGrpSpPr/>
+        <p:nvPr/>
+      </p:nvGrpSpPr>
+      <p:grpSpPr>
+        <a:xfrm>
+          <a:off x="0" y="0"/>
+          <a:ext cx="0" cy="0"/>
+          <a:chOff x="0" y="0"/>
+          <a:chExt cx="0" cy="0"/>
+        </a:xfrm>
+      </p:grpSpPr>
+      <p:sp>
+        <p:nvSpPr>
+          <p:cNvPr id="2" name="Text 0"/>
+          <p:cNvSpPr/>
+          <p:nvPr/>
+        </p:nvSpPr>
+        <p:spPr>
+          <a:xfrm>
+            <a:off x="1371600" y="548640"/>
+            <a:ext cx="9418320" cy="640080"/>
+          </a:xfrm>
+          <a:prstGeom prst="rect">
+            <a:avLst/>
+          </a:prstGeom>
+          <a:noFill/>
+          <a:ln/>
+        </p:spPr>
+        <p:txBody>
+          <a:bodyPr wrap="square" lIns="0" tIns="0" rIns="0" bIns="0" rtlCol="0" anchor="ctr"/>
+          <a:lstStyle/>
+          <a:p>
+            <a:pPr indent="0" marL="0">
+              <a:buNone/>
+            </a:pPr>
+            <a:r>
+              <a:rPr lang="en-US" sz="2600" dirty="0">
+                <a:solidFill>
+                  <a:srgbClr val="0F172A"/>
+                </a:solidFill>
+                <a:latin typeface="Georgia" pitchFamily="34" charset="0"/>
+                <a:ea typeface="Georgia" pitchFamily="34" charset="-122"/>
+                <a:cs typeface="Georgia" pitchFamily="34" charset="-120"/>
+              </a:rPr>
+              <a:t>Meta Ads — Top Ads</a:t>
+            </a:r>
+            <a:endParaRPr lang="en-US" sz="2600" dirty="0"/>
+          </a:p>
+        </p:txBody>
+      </p:sp>
+      <p:sp>
+        <p:nvSpPr>
+          <p:cNvPr id="3" name="Shape 1"/>
+          <p:cNvSpPr/>
+          <p:nvPr/>
+        </p:nvSpPr>
+        <p:spPr>
+          <a:xfrm>
+            <a:off x="1371600" y="1234440"/>
+            <a:ext cx="1828800" cy="13716"/>
+          </a:xfrm>
+          <a:prstGeom prst="rect">
+            <a:avLst/>
+          </a:prstGeom>
+          <a:solidFill>
+            <a:srgbClr val="0F172A"/>
+          </a:solidFill>
+          <a:ln/>
+        </p:spPr>
+      </p:sp>
+      <p:sp>
+        <p:nvSpPr>
+          <p:cNvPr id="4" name="Text 2"/>
+          <p:cNvSpPr/>
+          <p:nvPr/>
+        </p:nvSpPr>
+        <p:spPr>
+          <a:xfrm>
+            <a:off x="1371600" y="1463040"/>
+            <a:ext cx="9418320" cy="3657600"/>
+          </a:xfrm>
+          <a:prstGeom prst="rect">
+            <a:avLst/>
+          </a:prstGeom>
+          <a:noFill/>
+          <a:ln/>
+        </p:spPr>
+        <p:txBody>
+          <a:bodyPr wrap="square" rtlCol="0" anchor="ctr"/>
+          <a:lstStyle/>
+          <a:p>
+            <a:pPr algn="ctr" indent="0" marL="0">
+              <a:buNone/>
+            </a:pPr>
+            <a:r>
+              <a:rPr lang="en-US" sz="1000" dirty="0">
+                <a:solidFill>
+                  <a:srgbClr val="94A3B8"/>
+                </a:solidFill>
+                <a:latin typeface="Calibri" pitchFamily="34" charset="0"/>
+                <a:ea typeface="Calibri" pitchFamily="34" charset="-122"/>
+                <a:cs typeface="Calibri" pitchFamily="34" charset="-120"/>
+              </a:rPr>
+              <a:t>{{chart_campaigns}}</a:t>
+            </a:r>
+            <a:endParaRPr lang="en-US" sz="1000" dirty="0"/>
+          </a:p>
+        </p:txBody>
+      </p:sp>
+      <p:sp>
+        <p:nvSpPr>
+          <p:cNvPr id="5" name="Text 3"/>
+          <p:cNvSpPr/>
+          <p:nvPr/>
+        </p:nvSpPr>
+        <p:spPr>
+          <a:xfrm>
+            <a:off x="1371600" y="5394960"/>
+            <a:ext cx="9418320" cy="1097280"/>
+          </a:xfrm>
+          <a:prstGeom prst="rect">
+            <a:avLst/>
+          </a:prstGeom>
+          <a:noFill/>
+          <a:ln/>
+        </p:spPr>
+        <p:txBody>
+          <a:bodyPr wrap="square" rtlCol="0" anchor="t"/>
+          <a:lstStyle/>
+          <a:p>
+            <a:pPr indent="0" marL="0">
+              <a:lnSpc>
+                <a:spcPct val="140000"/>
+              </a:lnSpc>
+              <a:buNone/>
+            </a:pPr>
+            <a:r>
+              <a:rPr lang="en-US" sz="1200" dirty="0">
+                <a:solidFill>
+                  <a:srgbClr val="334155"/>
+                </a:solidFill>
+                <a:latin typeface="Calibri" pitchFamily="34" charset="0"/>
+                <a:ea typeface="Calibri" pitchFamily="34" charset="-122"/>
+                <a:cs typeface="Calibri" pitchFamily="34" charset="-120"/>
+              </a:rPr>
+              <a:t>{{ads_narrative}}</a:t>
+            </a:r>
+            <a:endParaRPr lang="en-US" sz="1200" dirty="0"/>
+          </a:p>
+        </p:txBody>
+      </p:sp>
+      <p:sp>
+        <p:nvSpPr>
+          <p:cNvPr id="6" name="Shape 4"/>
+          <p:cNvSpPr/>
+          <p:nvPr/>
+        </p:nvSpPr>
+        <p:spPr>
+          <a:xfrm>
+            <a:off x="1371600" y="6355080"/>
+            <a:ext cx="9418320" cy="4572"/>
+          </a:xfrm>
+          <a:prstGeom prst="rect">
+            <a:avLst/>
+          </a:prstGeom>
+          <a:solidFill>
+            <a:srgbClr val="E2E8F0"/>
+          </a:solidFill>
+          <a:ln/>
+        </p:spPr>
+      </p:sp>
+      <p:sp>
+        <p:nvSpPr>
+          <p:cNvPr id="7" name="Text 5"/>
+          <p:cNvSpPr/>
+          <p:nvPr/>
+        </p:nvSpPr>
+        <p:spPr>
+          <a:xfrm>
+            <a:off x="1371600" y="6446520"/>
+            <a:ext cx="9418320" cy="256032"/>
+          </a:xfrm>
+          <a:prstGeom prst="rect">
+            <a:avLst/>
+          </a:prstGeom>
+          <a:noFill/>
+          <a:ln/>
+        </p:spPr>
+        <p:txBody>
+          <a:bodyPr wrap="square" rtlCol="0" anchor="ctr"/>
+          <a:lstStyle/>
+          <a:p>
+            <a:pPr algn="ctr" indent="0" marL="0">
+              <a:buNone/>
+            </a:pPr>
+            <a:r>
+              <a:rPr lang="en-US" sz="700" dirty="0">
+                <a:solidFill>
+                  <a:srgbClr val="94A3B8"/>
+                </a:solidFill>
+                <a:latin typeface="Calibri" pitchFamily="34" charset="0"/>
+                <a:ea typeface="Calibri" pitchFamily="34" charset="-122"/>
+                <a:cs typeface="Calibri" pitchFamily="34" charset="-120"/>
+              </a:rPr>
+              <a:t>{{agency_name}}  •  Page 10</a:t>
+            </a:r>
+            <a:endParaRPr lang="en-US" sz="700" dirty="0"/>
+          </a:p>
+        </p:txBody>
+      </p:sp>
+    </p:spTree>
+  </p:cSld>
+  <p:clrMapOvr>
+    <a:masterClrMapping/>
+  </p:clrMapOvr>
+</p:sld>
+</file>
+
+<file path=ppt/slides/slide11.xml><?xml version="1.0" encoding="utf-8"?>
+<p:sld xmlns:a="http://schemas.openxmlformats.org/drawingml/2006/main" xmlns:r="http://schemas.openxmlformats.org/officeDocument/2006/relationships" xmlns:p="http://schemas.openxmlformats.org/presentationml/2006/main">
+  <p:cSld name="Slide 11">
+    <p:bg>
+      <p:bgPr>
+        <a:solidFill>
+          <a:srgbClr val="FFFFFF"/>
+        </a:solidFill>
+      </p:bgPr>
+    </p:bg>
+    <p:spTree>
+      <p:nvGrpSpPr>
+        <p:cNvPr id="1" name=""/>
+        <p:cNvGrpSpPr/>
+        <p:nvPr/>
+      </p:nvGrpSpPr>
+      <p:grpSpPr>
+        <a:xfrm>
+          <a:off x="0" y="0"/>
+          <a:ext cx="0" cy="0"/>
+          <a:chOff x="0" y="0"/>
+          <a:chExt cx="0" cy="0"/>
+        </a:xfrm>
+      </p:grpSpPr>
+      <p:sp>
+        <p:nvSpPr>
+          <p:cNvPr id="2" name="Text 0"/>
+          <p:cNvSpPr/>
+          <p:nvPr/>
+        </p:nvSpPr>
+        <p:spPr>
+          <a:xfrm>
+            <a:off x="1371600" y="548640"/>
+            <a:ext cx="9418320" cy="640080"/>
+          </a:xfrm>
+          <a:prstGeom prst="rect">
+            <a:avLst/>
+          </a:prstGeom>
+          <a:noFill/>
+          <a:ln/>
+        </p:spPr>
+        <p:txBody>
+          <a:bodyPr wrap="square" lIns="0" tIns="0" rIns="0" bIns="0" rtlCol="0" anchor="ctr"/>
+          <a:lstStyle/>
+          <a:p>
+            <a:pPr indent="0" marL="0">
+              <a:buNone/>
+            </a:pPr>
+            <a:r>
+              <a:rPr lang="en-US" sz="2600" dirty="0">
+                <a:solidFill>
+                  <a:srgbClr val="0F172A"/>
+                </a:solidFill>
+                <a:latin typeface="Georgia" pitchFamily="34" charset="0"/>
+                <a:ea typeface="Georgia" pitchFamily="34" charset="-122"/>
+                <a:cs typeface="Georgia" pitchFamily="34" charset="-120"/>
+              </a:rPr>
+              <a:t>Search Advertising — Google Ads</a:t>
+            </a:r>
+            <a:endParaRPr lang="en-US" sz="2600" dirty="0"/>
+          </a:p>
+        </p:txBody>
+      </p:sp>
+      <p:sp>
+        <p:nvSpPr>
+          <p:cNvPr id="3" name="Shape 1"/>
+          <p:cNvSpPr/>
+          <p:nvPr/>
+        </p:nvSpPr>
+        <p:spPr>
+          <a:xfrm>
+            <a:off x="1371600" y="1234440"/>
+            <a:ext cx="1828800" cy="13716"/>
+          </a:xfrm>
+          <a:prstGeom prst="rect">
+            <a:avLst/>
+          </a:prstGeom>
+          <a:solidFill>
+            <a:srgbClr val="0F172A"/>
+          </a:solidFill>
+          <a:ln/>
+        </p:spPr>
+      </p:sp>
+      <p:sp>
+        <p:nvSpPr>
+          <p:cNvPr id="4" name="Text 2"/>
+          <p:cNvSpPr/>
+          <p:nvPr/>
+        </p:nvSpPr>
+        <p:spPr>
+          <a:xfrm>
+            <a:off x="731520" y="1463040"/>
+            <a:ext cx="5120640" cy="2743200"/>
+          </a:xfrm>
+          <a:prstGeom prst="rect">
+            <a:avLst/>
+          </a:prstGeom>
+          <a:noFill/>
+          <a:ln/>
+        </p:spPr>
+        <p:txBody>
+          <a:bodyPr wrap="square" rtlCol="0" anchor="ctr"/>
+          <a:lstStyle/>
+          <a:p>
+            <a:pPr algn="ctr" indent="0" marL="0">
+              <a:buNone/>
+            </a:pPr>
+            <a:r>
+              <a:rPr lang="en-US" sz="1000" dirty="0">
+                <a:solidFill>
+                  <a:srgbClr val="94A3B8"/>
+                </a:solidFill>
+                <a:latin typeface="Calibri" pitchFamily="34" charset="0"/>
+                <a:ea typeface="Calibri" pitchFamily="34" charset="-122"/>
+                <a:cs typeface="Calibri" pitchFamily="34" charset="-120"/>
+              </a:rPr>
+              <a:t>{{chart_gads_spend}}</a:t>
+            </a:r>
+            <a:endParaRPr lang="en-US" sz="1000" dirty="0"/>
+          </a:p>
+        </p:txBody>
+      </p:sp>
+      <p:sp>
+        <p:nvSpPr>
+          <p:cNvPr id="5" name="Text 3"/>
+          <p:cNvSpPr/>
+          <p:nvPr/>
+        </p:nvSpPr>
+        <p:spPr>
+          <a:xfrm>
+            <a:off x="6217920" y="1463040"/>
+            <a:ext cx="5212080" cy="2743200"/>
+          </a:xfrm>
+          <a:prstGeom prst="rect">
+            <a:avLst/>
+          </a:prstGeom>
+          <a:noFill/>
+          <a:ln/>
+        </p:spPr>
+        <p:txBody>
+          <a:bodyPr wrap="square" rtlCol="0" anchor="ctr"/>
+          <a:lstStyle/>
+          <a:p>
+            <a:pPr algn="ctr" indent="0" marL="0">
+              <a:buNone/>
+            </a:pPr>
+            <a:r>
+              <a:rPr lang="en-US" sz="1000" dirty="0">
+                <a:solidFill>
+                  <a:srgbClr val="94A3B8"/>
+                </a:solidFill>
+                <a:latin typeface="Calibri" pitchFamily="34" charset="0"/>
+                <a:ea typeface="Calibri" pitchFamily="34" charset="-122"/>
+                <a:cs typeface="Calibri" pitchFamily="34" charset="-120"/>
+              </a:rPr>
+              <a:t>{{chart_gads_campaigns}}</a:t>
+            </a:r>
+            <a:endParaRPr lang="en-US" sz="1000" dirty="0"/>
+          </a:p>
+        </p:txBody>
+      </p:sp>
+      <p:sp>
+        <p:nvSpPr>
+          <p:cNvPr id="6" name="Text 4"/>
+          <p:cNvSpPr/>
+          <p:nvPr/>
+        </p:nvSpPr>
+        <p:spPr>
+          <a:xfrm>
+            <a:off x="1371600" y="4480560"/>
+            <a:ext cx="9418320" cy="1737360"/>
+          </a:xfrm>
+          <a:prstGeom prst="rect">
+            <a:avLst/>
+          </a:prstGeom>
+          <a:noFill/>
+          <a:ln/>
+        </p:spPr>
+        <p:txBody>
+          <a:bodyPr wrap="square" rtlCol="0" anchor="t"/>
+          <a:lstStyle/>
+          <a:p>
+            <a:pPr indent="0" marL="0">
+              <a:lnSpc>
+                <a:spcPct val="140000"/>
+              </a:lnSpc>
+              <a:buNone/>
+            </a:pPr>
+            <a:r>
+              <a:rPr lang="en-US" sz="1200" dirty="0">
+                <a:solidFill>
+                  <a:srgbClr val="334155"/>
+                </a:solidFill>
+                <a:latin typeface="Calibri" pitchFamily="34" charset="0"/>
+                <a:ea typeface="Calibri" pitchFamily="34" charset="-122"/>
+                <a:cs typeface="Calibri" pitchFamily="34" charset="-120"/>
+              </a:rPr>
+              <a:t>{{google_ads_narrative}}</a:t>
+            </a:r>
+            <a:endParaRPr lang="en-US" sz="1200" dirty="0"/>
+          </a:p>
+        </p:txBody>
+      </p:sp>
+      <p:sp>
+        <p:nvSpPr>
+          <p:cNvPr id="7" name="Shape 5"/>
+          <p:cNvSpPr/>
+          <p:nvPr/>
+        </p:nvSpPr>
+        <p:spPr>
+          <a:xfrm>
+            <a:off x="1371600" y="6355080"/>
+            <a:ext cx="9418320" cy="4572"/>
+          </a:xfrm>
+          <a:prstGeom prst="rect">
+            <a:avLst/>
+          </a:prstGeom>
+          <a:solidFill>
+            <a:srgbClr val="E2E8F0"/>
+          </a:solidFill>
+          <a:ln/>
+        </p:spPr>
+      </p:sp>
+      <p:sp>
+        <p:nvSpPr>
+          <p:cNvPr id="8" name="Text 6"/>
+          <p:cNvSpPr/>
+          <p:nvPr/>
+        </p:nvSpPr>
+        <p:spPr>
+          <a:xfrm>
+            <a:off x="1371600" y="6446520"/>
+            <a:ext cx="9418320" cy="256032"/>
+          </a:xfrm>
+          <a:prstGeom prst="rect">
+            <a:avLst/>
+          </a:prstGeom>
+          <a:noFill/>
+          <a:ln/>
+        </p:spPr>
+        <p:txBody>
+          <a:bodyPr wrap="square" rtlCol="0" anchor="ctr"/>
+          <a:lstStyle/>
+          <a:p>
+            <a:pPr algn="ctr" indent="0" marL="0">
+              <a:buNone/>
+            </a:pPr>
+            <a:r>
+              <a:rPr lang="en-US" sz="700" dirty="0">
+                <a:solidFill>
+                  <a:srgbClr val="94A3B8"/>
+                </a:solidFill>
+                <a:latin typeface="Calibri" pitchFamily="34" charset="0"/>
+                <a:ea typeface="Calibri" pitchFamily="34" charset="-122"/>
+                <a:cs typeface="Calibri" pitchFamily="34" charset="-120"/>
+              </a:rPr>
+              <a:t>{{agency_name}}  •  Page 11</a:t>
+            </a:r>
+            <a:endParaRPr lang="en-US" sz="700" dirty="0"/>
+          </a:p>
+        </p:txBody>
+      </p:sp>
+    </p:spTree>
+  </p:cSld>
+  <p:clrMapOvr>
+    <a:masterClrMapping/>
+  </p:clrMapOvr>
+</p:sld>
+</file>
+
+<file path=ppt/slides/slide12.xml><?xml version="1.0" encoding="utf-8"?>
+<p:sld xmlns:a="http://schemas.openxmlformats.org/drawingml/2006/main" xmlns:r="http://schemas.openxmlformats.org/officeDocument/2006/relationships" xmlns:p="http://schemas.openxmlformats.org/presentationml/2006/main">
+  <p:cSld name="Slide 12">
+    <p:bg>
+      <p:bgPr>
+        <a:solidFill>
+          <a:srgbClr val="FFFFFF"/>
+        </a:solidFill>
+      </p:bgPr>
+    </p:bg>
+    <p:spTree>
+      <p:nvGrpSpPr>
+        <p:cNvPr id="1" name=""/>
+        <p:cNvGrpSpPr/>
+        <p:nvPr/>
+      </p:nvGrpSpPr>
+      <p:grpSpPr>
+        <a:xfrm>
+          <a:off x="0" y="0"/>
+          <a:ext cx="0" cy="0"/>
+          <a:chOff x="0" y="0"/>
+          <a:chExt cx="0" cy="0"/>
+        </a:xfrm>
+      </p:grpSpPr>
+      <p:sp>
+        <p:nvSpPr>
+          <p:cNvPr id="2" name="Text 0"/>
+          <p:cNvSpPr/>
+          <p:nvPr/>
+        </p:nvSpPr>
+        <p:spPr>
+          <a:xfrm>
+            <a:off x="1371600" y="548640"/>
+            <a:ext cx="9418320" cy="640080"/>
+          </a:xfrm>
+          <a:prstGeom prst="rect">
+            <a:avLst/>
+          </a:prstGeom>
+          <a:noFill/>
+          <a:ln/>
+        </p:spPr>
+        <p:txBody>
+          <a:bodyPr wrap="square" lIns="0" tIns="0" rIns="0" bIns="0" rtlCol="0" anchor="ctr"/>
+          <a:lstStyle/>
+          <a:p>
+            <a:pPr indent="0" marL="0">
+              <a:buNone/>
+            </a:pPr>
+            <a:r>
+              <a:rPr lang="en-US" sz="2600" dirty="0">
+                <a:solidFill>
+                  <a:srgbClr val="0F172A"/>
+                </a:solidFill>
+                <a:latin typeface="Georgia" pitchFamily="34" charset="0"/>
+                <a:ea typeface="Georgia" pitchFamily="34" charset="-122"/>
+                <a:cs typeface="Georgia" pitchFamily="34" charset="-120"/>
+              </a:rPr>
+              <a:t>Search Terms Performance</a:t>
+            </a:r>
+            <a:endParaRPr lang="en-US" sz="2600" dirty="0"/>
+          </a:p>
+        </p:txBody>
+      </p:sp>
+      <p:sp>
+        <p:nvSpPr>
+          <p:cNvPr id="3" name="Shape 1"/>
+          <p:cNvSpPr/>
+          <p:nvPr/>
+        </p:nvSpPr>
+        <p:spPr>
+          <a:xfrm>
+            <a:off x="1371600" y="1234440"/>
+            <a:ext cx="1828800" cy="13716"/>
+          </a:xfrm>
+          <a:prstGeom prst="rect">
+            <a:avLst/>
+          </a:prstGeom>
+          <a:solidFill>
+            <a:srgbClr val="0F172A"/>
+          </a:solidFill>
+          <a:ln/>
+        </p:spPr>
+      </p:sp>
+      <p:sp>
+        <p:nvSpPr>
+          <p:cNvPr id="4" name="Text 2"/>
+          <p:cNvSpPr/>
+          <p:nvPr/>
+        </p:nvSpPr>
+        <p:spPr>
+          <a:xfrm>
+            <a:off x="1371600" y="1463040"/>
+            <a:ext cx="9418320" cy="3657600"/>
+          </a:xfrm>
+          <a:prstGeom prst="rect">
+            <a:avLst/>
+          </a:prstGeom>
+          <a:noFill/>
+          <a:ln/>
+        </p:spPr>
+        <p:txBody>
+          <a:bodyPr wrap="square" rtlCol="0" anchor="ctr"/>
+          <a:lstStyle/>
+          <a:p>
+            <a:pPr algn="ctr" indent="0" marL="0">
+              <a:buNone/>
+            </a:pPr>
+            <a:r>
+              <a:rPr lang="en-US" sz="1000" dirty="0">
+                <a:solidFill>
+                  <a:srgbClr val="94A3B8"/>
+                </a:solidFill>
+                <a:latin typeface="Calibri" pitchFamily="34" charset="0"/>
+                <a:ea typeface="Calibri" pitchFamily="34" charset="-122"/>
+                <a:cs typeface="Calibri" pitchFamily="34" charset="-120"/>
+              </a:rPr>
+              <a:t>{{chart_search_terms}}</a:t>
+            </a:r>
+            <a:endParaRPr lang="en-US" sz="1000" dirty="0"/>
+          </a:p>
+        </p:txBody>
+      </p:sp>
+      <p:sp>
+        <p:nvSpPr>
+          <p:cNvPr id="5" name="Text 3"/>
+          <p:cNvSpPr/>
+          <p:nvPr/>
+        </p:nvSpPr>
+        <p:spPr>
+          <a:xfrm>
+            <a:off x="1371600" y="5394960"/>
+            <a:ext cx="9418320" cy="1097280"/>
+          </a:xfrm>
+          <a:prstGeom prst="rect">
+            <a:avLst/>
+          </a:prstGeom>
+          <a:noFill/>
+          <a:ln/>
+        </p:spPr>
+        <p:txBody>
+          <a:bodyPr wrap="square" rtlCol="0" anchor="t"/>
+          <a:lstStyle/>
+          <a:p>
+            <a:pPr indent="0" marL="0">
+              <a:lnSpc>
+                <a:spcPct val="140000"/>
+              </a:lnSpc>
+              <a:buNone/>
+            </a:pPr>
+            <a:r>
+              <a:rPr lang="en-US" sz="1200" dirty="0">
+                <a:solidFill>
+                  <a:srgbClr val="334155"/>
+                </a:solidFill>
+                <a:latin typeface="Calibri" pitchFamily="34" charset="0"/>
+                <a:ea typeface="Calibri" pitchFamily="34" charset="-122"/>
+                <a:cs typeface="Calibri" pitchFamily="34" charset="-120"/>
+              </a:rPr>
+              <a:t>{{google_ads_narrative}}</a:t>
+            </a:r>
+            <a:endParaRPr lang="en-US" sz="1200" dirty="0"/>
+          </a:p>
+        </p:txBody>
+      </p:sp>
+      <p:sp>
+        <p:nvSpPr>
+          <p:cNvPr id="6" name="Shape 4"/>
+          <p:cNvSpPr/>
+          <p:nvPr/>
+        </p:nvSpPr>
+        <p:spPr>
+          <a:xfrm>
+            <a:off x="1371600" y="6355080"/>
+            <a:ext cx="9418320" cy="4572"/>
+          </a:xfrm>
+          <a:prstGeom prst="rect">
+            <a:avLst/>
+          </a:prstGeom>
+          <a:solidFill>
+            <a:srgbClr val="E2E8F0"/>
+          </a:solidFill>
+          <a:ln/>
+        </p:spPr>
+      </p:sp>
+      <p:sp>
+        <p:nvSpPr>
+          <p:cNvPr id="7" name="Text 5"/>
+          <p:cNvSpPr/>
+          <p:nvPr/>
+        </p:nvSpPr>
+        <p:spPr>
+          <a:xfrm>
+            <a:off x="1371600" y="6446520"/>
+            <a:ext cx="9418320" cy="256032"/>
+          </a:xfrm>
+          <a:prstGeom prst="rect">
+            <a:avLst/>
+          </a:prstGeom>
+          <a:noFill/>
+          <a:ln/>
+        </p:spPr>
+        <p:txBody>
+          <a:bodyPr wrap="square" rtlCol="0" anchor="ctr"/>
+          <a:lstStyle/>
+          <a:p>
+            <a:pPr algn="ctr" indent="0" marL="0">
+              <a:buNone/>
+            </a:pPr>
+            <a:r>
+              <a:rPr lang="en-US" sz="700" dirty="0">
+                <a:solidFill>
+                  <a:srgbClr val="94A3B8"/>
+                </a:solidFill>
+                <a:latin typeface="Calibri" pitchFamily="34" charset="0"/>
+                <a:ea typeface="Calibri" pitchFamily="34" charset="-122"/>
+                <a:cs typeface="Calibri" pitchFamily="34" charset="-120"/>
+              </a:rPr>
+              <a:t>{{agency_name}}  •  Page 12</a:t>
+            </a:r>
+            <a:endParaRPr lang="en-US" sz="700" dirty="0"/>
+          </a:p>
+        </p:txBody>
+      </p:sp>
+    </p:spTree>
+  </p:cSld>
+  <p:clrMapOvr>
+    <a:masterClrMapping/>
+  </p:clrMapOvr>
+</p:sld>
+</file>
+
+<file path=ppt/slides/slide13.xml><?xml version="1.0" encoding="utf-8"?>
+<p:sld xmlns:a="http://schemas.openxmlformats.org/drawingml/2006/main" xmlns:r="http://schemas.openxmlformats.org/officeDocument/2006/relationships" xmlns:p="http://schemas.openxmlformats.org/presentationml/2006/main">
+  <p:cSld name="Slide 13">
+    <p:bg>
+      <p:bgPr>
+        <a:solidFill>
+          <a:srgbClr val="FFFFFF"/>
+        </a:solidFill>
+      </p:bgPr>
+    </p:bg>
+    <p:spTree>
+      <p:nvGrpSpPr>
+        <p:cNvPr id="1" name=""/>
+        <p:cNvGrpSpPr/>
+        <p:nvPr/>
+      </p:nvGrpSpPr>
+      <p:grpSpPr>
+        <a:xfrm>
+          <a:off x="0" y="0"/>
+          <a:ext cx="0" cy="0"/>
+          <a:chOff x="0" y="0"/>
+          <a:chExt cx="0" cy="0"/>
+        </a:xfrm>
+      </p:grpSpPr>
+      <p:sp>
+        <p:nvSpPr>
+          <p:cNvPr id="2" name="Text 0"/>
+          <p:cNvSpPr/>
+          <p:nvPr/>
+        </p:nvSpPr>
+        <p:spPr>
+          <a:xfrm>
+            <a:off x="1371600" y="548640"/>
+            <a:ext cx="9418320" cy="640080"/>
+          </a:xfrm>
+          <a:prstGeom prst="rect">
+            <a:avLst/>
+          </a:prstGeom>
+          <a:noFill/>
+          <a:ln/>
+        </p:spPr>
+        <p:txBody>
+          <a:bodyPr wrap="square" lIns="0" tIns="0" rIns="0" bIns="0" rtlCol="0" anchor="ctr"/>
+          <a:lstStyle/>
+          <a:p>
+            <a:pPr indent="0" marL="0">
+              <a:buNone/>
+            </a:pPr>
+            <a:r>
+              <a:rPr lang="en-US" sz="2600" dirty="0">
+                <a:solidFill>
+                  <a:srgbClr val="0F172A"/>
+                </a:solidFill>
+                <a:latin typeface="Georgia" pitchFamily="34" charset="0"/>
+                <a:ea typeface="Georgia" pitchFamily="34" charset="-122"/>
+                <a:cs typeface="Georgia" pitchFamily="34" charset="-120"/>
+              </a:rPr>
+              <a:t>Organic Search — SEO</a:t>
+            </a:r>
+            <a:endParaRPr lang="en-US" sz="2600" dirty="0"/>
+          </a:p>
+        </p:txBody>
+      </p:sp>
+      <p:sp>
+        <p:nvSpPr>
+          <p:cNvPr id="3" name="Shape 1"/>
+          <p:cNvSpPr/>
+          <p:nvPr/>
+        </p:nvSpPr>
+        <p:spPr>
+          <a:xfrm>
+            <a:off x="1371600" y="1234440"/>
+            <a:ext cx="1828800" cy="13716"/>
+          </a:xfrm>
+          <a:prstGeom prst="rect">
+            <a:avLst/>
+          </a:prstGeom>
+          <a:solidFill>
+            <a:srgbClr val="0F172A"/>
+          </a:solidFill>
+          <a:ln/>
+        </p:spPr>
+      </p:sp>
+      <p:sp>
+        <p:nvSpPr>
+          <p:cNvPr id="4" name="Text 2"/>
+          <p:cNvSpPr/>
+          <p:nvPr/>
+        </p:nvSpPr>
+        <p:spPr>
+          <a:xfrm>
+            <a:off x="731520" y="1463040"/>
+            <a:ext cx="5120640" cy="2743200"/>
+          </a:xfrm>
+          <a:prstGeom prst="rect">
+            <a:avLst/>
+          </a:prstGeom>
+          <a:noFill/>
+          <a:ln/>
+        </p:spPr>
+        <p:txBody>
+          <a:bodyPr wrap="square" rtlCol="0" anchor="ctr"/>
+          <a:lstStyle/>
+          <a:p>
+            <a:pPr algn="ctr" indent="0" marL="0">
+              <a:buNone/>
+            </a:pPr>
+            <a:r>
+              <a:rPr lang="en-US" sz="1000" dirty="0">
+                <a:solidFill>
+                  <a:srgbClr val="94A3B8"/>
+                </a:solidFill>
+                <a:latin typeface="Calibri" pitchFamily="34" charset="0"/>
+                <a:ea typeface="Calibri" pitchFamily="34" charset="-122"/>
+                <a:cs typeface="Calibri" pitchFamily="34" charset="-120"/>
+              </a:rPr>
+              <a:t>{{chart_seo_trend}}</a:t>
+            </a:r>
+            <a:endParaRPr lang="en-US" sz="1000" dirty="0"/>
+          </a:p>
+        </p:txBody>
+      </p:sp>
+      <p:sp>
+        <p:nvSpPr>
+          <p:cNvPr id="5" name="Text 3"/>
+          <p:cNvSpPr/>
+          <p:nvPr/>
+        </p:nvSpPr>
+        <p:spPr>
+          <a:xfrm>
+            <a:off x="6217920" y="1463040"/>
+            <a:ext cx="5212080" cy="2743200"/>
+          </a:xfrm>
+          <a:prstGeom prst="rect">
+            <a:avLst/>
+          </a:prstGeom>
+          <a:noFill/>
+          <a:ln/>
+        </p:spPr>
+        <p:txBody>
+          <a:bodyPr wrap="square" rtlCol="0" anchor="ctr"/>
+          <a:lstStyle/>
+          <a:p>
+            <a:pPr algn="ctr" indent="0" marL="0">
+              <a:buNone/>
+            </a:pPr>
+            <a:r>
+              <a:rPr lang="en-US" sz="1000" dirty="0">
+                <a:solidFill>
+                  <a:srgbClr val="94A3B8"/>
+                </a:solidFill>
+                <a:latin typeface="Calibri" pitchFamily="34" charset="0"/>
+                <a:ea typeface="Calibri" pitchFamily="34" charset="-122"/>
+                <a:cs typeface="Calibri" pitchFamily="34" charset="-120"/>
+              </a:rPr>
+              <a:t>{{chart_top_queries}}</a:t>
+            </a:r>
+            <a:endParaRPr lang="en-US" sz="1000" dirty="0"/>
+          </a:p>
+        </p:txBody>
+      </p:sp>
+      <p:sp>
+        <p:nvSpPr>
+          <p:cNvPr id="6" name="Text 4"/>
+          <p:cNvSpPr/>
+          <p:nvPr/>
+        </p:nvSpPr>
+        <p:spPr>
+          <a:xfrm>
+            <a:off x="1371600" y="4480560"/>
+            <a:ext cx="9418320" cy="1737360"/>
+          </a:xfrm>
+          <a:prstGeom prst="rect">
+            <a:avLst/>
+          </a:prstGeom>
+          <a:noFill/>
+          <a:ln/>
+        </p:spPr>
+        <p:txBody>
+          <a:bodyPr wrap="square" rtlCol="0" anchor="t"/>
+          <a:lstStyle/>
+          <a:p>
+            <a:pPr indent="0" marL="0">
+              <a:lnSpc>
+                <a:spcPct val="140000"/>
+              </a:lnSpc>
+              <a:buNone/>
+            </a:pPr>
+            <a:r>
+              <a:rPr lang="en-US" sz="1200" dirty="0">
+                <a:solidFill>
+                  <a:srgbClr val="334155"/>
+                </a:solidFill>
+                <a:latin typeface="Calibri" pitchFamily="34" charset="0"/>
+                <a:ea typeface="Calibri" pitchFamily="34" charset="-122"/>
+                <a:cs typeface="Calibri" pitchFamily="34" charset="-120"/>
+              </a:rPr>
+              <a:t>{{seo_narrative}}</a:t>
+            </a:r>
+            <a:endParaRPr lang="en-US" sz="1200" dirty="0"/>
+          </a:p>
+        </p:txBody>
+      </p:sp>
+      <p:sp>
+        <p:nvSpPr>
+          <p:cNvPr id="7" name="Shape 5"/>
+          <p:cNvSpPr/>
+          <p:nvPr/>
+        </p:nvSpPr>
+        <p:spPr>
+          <a:xfrm>
+            <a:off x="1371600" y="6355080"/>
+            <a:ext cx="9418320" cy="4572"/>
+          </a:xfrm>
+          <a:prstGeom prst="rect">
+            <a:avLst/>
+          </a:prstGeom>
+          <a:solidFill>
+            <a:srgbClr val="E2E8F0"/>
+          </a:solidFill>
+          <a:ln/>
+        </p:spPr>
+      </p:sp>
+      <p:sp>
+        <p:nvSpPr>
+          <p:cNvPr id="8" name="Text 6"/>
+          <p:cNvSpPr/>
+          <p:nvPr/>
+        </p:nvSpPr>
+        <p:spPr>
+          <a:xfrm>
+            <a:off x="1371600" y="6446520"/>
+            <a:ext cx="9418320" cy="256032"/>
+          </a:xfrm>
+          <a:prstGeom prst="rect">
+            <a:avLst/>
+          </a:prstGeom>
+          <a:noFill/>
+          <a:ln/>
+        </p:spPr>
+        <p:txBody>
+          <a:bodyPr wrap="square" rtlCol="0" anchor="ctr"/>
+          <a:lstStyle/>
+          <a:p>
+            <a:pPr algn="ctr" indent="0" marL="0">
+              <a:buNone/>
+            </a:pPr>
+            <a:r>
+              <a:rPr lang="en-US" sz="700" dirty="0">
+                <a:solidFill>
+                  <a:srgbClr val="94A3B8"/>
+                </a:solidFill>
+                <a:latin typeface="Calibri" pitchFamily="34" charset="0"/>
+                <a:ea typeface="Calibri" pitchFamily="34" charset="-122"/>
+                <a:cs typeface="Calibri" pitchFamily="34" charset="-120"/>
+              </a:rPr>
+              <a:t>{{agency_name}}  •  Page 13</a:t>
+            </a:r>
+            <a:endParaRPr lang="en-US" sz="700" dirty="0"/>
+          </a:p>
+        </p:txBody>
+      </p:sp>
+    </p:spTree>
+  </p:cSld>
+  <p:clrMapOvr>
+    <a:masterClrMapping/>
+  </p:clrMapOvr>
+</p:sld>
+</file>
+
+<file path=ppt/slides/slide14.xml><?xml version="1.0" encoding="utf-8"?>
+<p:sld xmlns:a="http://schemas.openxmlformats.org/drawingml/2006/main" xmlns:r="http://schemas.openxmlformats.org/officeDocument/2006/relationships" xmlns:p="http://schemas.openxmlformats.org/presentationml/2006/main">
+  <p:cSld name="Slide 14">
+    <p:bg>
+      <p:bgPr>
+        <a:solidFill>
+          <a:srgbClr val="FFFFFF"/>
+        </a:solidFill>
+      </p:bgPr>
+    </p:bg>
+    <p:spTree>
+      <p:nvGrpSpPr>
+        <p:cNvPr id="1" name=""/>
+        <p:cNvGrpSpPr/>
+        <p:nvPr/>
+      </p:nvGrpSpPr>
+      <p:grpSpPr>
+        <a:xfrm>
+          <a:off x="0" y="0"/>
+          <a:ext cx="0" cy="0"/>
+          <a:chOff x="0" y="0"/>
+          <a:chExt cx="0" cy="0"/>
+        </a:xfrm>
+      </p:grpSpPr>
+      <p:sp>
+        <p:nvSpPr>
+          <p:cNvPr id="2" name="Text 0"/>
+          <p:cNvSpPr/>
+          <p:nvPr/>
+        </p:nvSpPr>
+        <p:spPr>
+          <a:xfrm>
+            <a:off x="1371600" y="548640"/>
+            <a:ext cx="9418320" cy="640080"/>
+          </a:xfrm>
+          <a:prstGeom prst="rect">
+            <a:avLst/>
+          </a:prstGeom>
+          <a:noFill/>
+          <a:ln/>
+        </p:spPr>
+        <p:txBody>
+          <a:bodyPr wrap="square" lIns="0" tIns="0" rIns="0" bIns="0" rtlCol="0" anchor="ctr"/>
+          <a:lstStyle/>
+          <a:p>
+            <a:pPr indent="0" marL="0">
+              <a:buNone/>
+            </a:pPr>
+            <a:r>
+              <a:rPr lang="en-US" sz="2600" dirty="0">
+                <a:solidFill>
+                  <a:srgbClr val="0F172A"/>
+                </a:solidFill>
+                <a:latin typeface="Georgia" pitchFamily="34" charset="0"/>
+                <a:ea typeface="Georgia" pitchFamily="34" charset="-122"/>
+                <a:cs typeface="Georgia" pitchFamily="34" charset="-120"/>
+              </a:rPr>
+              <a:t>{{csv_source_name}}</a:t>
+            </a:r>
+            <a:endParaRPr lang="en-US" sz="2600" dirty="0"/>
+          </a:p>
+        </p:txBody>
+      </p:sp>
+      <p:sp>
+        <p:nvSpPr>
+          <p:cNvPr id="3" name="Shape 1"/>
+          <p:cNvSpPr/>
+          <p:nvPr/>
+        </p:nvSpPr>
+        <p:spPr>
+          <a:xfrm>
+            <a:off x="1371600" y="1234440"/>
+            <a:ext cx="1828800" cy="13716"/>
+          </a:xfrm>
+          <a:prstGeom prst="rect">
+            <a:avLst/>
+          </a:prstGeom>
+          <a:solidFill>
+            <a:srgbClr val="0F172A"/>
+          </a:solidFill>
+          <a:ln/>
+        </p:spPr>
+      </p:sp>
+      <p:sp>
+        <p:nvSpPr>
+          <p:cNvPr id="4" name="Text 2"/>
+          <p:cNvSpPr/>
+          <p:nvPr/>
+        </p:nvSpPr>
+        <p:spPr>
+          <a:xfrm>
+            <a:off x="1371600" y="1417320"/>
+            <a:ext cx="1828800" cy="502920"/>
+          </a:xfrm>
+          <a:prstGeom prst="rect">
+            <a:avLst/>
+          </a:prstGeom>
+          <a:noFill/>
+          <a:ln/>
+        </p:spPr>
+        <p:txBody>
+          <a:bodyPr wrap="square" rtlCol="0" anchor="ctr"/>
+          <a:lstStyle/>
+          <a:p>
+            <a:pPr indent="0" marL="0">
+              <a:buNone/>
+            </a:pPr>
+            <a:r>
+              <a:rPr lang="en-US" sz="900" b="1" spc="100" kern="0" dirty="0">
+                <a:solidFill>
+                  <a:srgbClr val="94A3B8"/>
+                </a:solidFill>
+                <a:latin typeface="Calibri" pitchFamily="34" charset="0"/>
+                <a:ea typeface="Calibri" pitchFamily="34" charset="-122"/>
+                <a:cs typeface="Calibri" pitchFamily="34" charset="-120"/>
+              </a:rPr>
+              <a:t>{{csv_kpi_0_label}}</a:t>
+            </a:r>
+            <a:endParaRPr lang="en-US" sz="900" dirty="0"/>
+          </a:p>
+        </p:txBody>
+      </p:sp>
+      <p:sp>
+        <p:nvSpPr>
+          <p:cNvPr id="5" name="Text 3"/>
+          <p:cNvSpPr/>
+          <p:nvPr/>
+        </p:nvSpPr>
+        <p:spPr>
+          <a:xfrm>
+            <a:off x="3291840" y="1417320"/>
+            <a:ext cx="2194560" cy="502920"/>
+          </a:xfrm>
+          <a:prstGeom prst="rect">
+            <a:avLst/>
+          </a:prstGeom>
+          <a:noFill/>
+          <a:ln/>
+        </p:spPr>
+        <p:txBody>
+          <a:bodyPr wrap="square" rtlCol="0" anchor="ctr"/>
+          <a:lstStyle/>
+          <a:p>
+            <a:pPr indent="0" marL="0">
+              <a:buNone/>
+            </a:pPr>
+            <a:r>
+              <a:rPr lang="en-US" sz="1800" b="1" dirty="0">
+                <a:solidFill>
+                  <a:srgbClr val="0F172A"/>
+                </a:solidFill>
+                <a:latin typeface="Calibri" pitchFamily="34" charset="0"/>
+                <a:ea typeface="Calibri" pitchFamily="34" charset="-122"/>
+                <a:cs typeface="Calibri" pitchFamily="34" charset="-120"/>
+              </a:rPr>
+              <a:t>{{csv_kpi_0_value}}</a:t>
+            </a:r>
+            <a:endParaRPr lang="en-US" sz="1800" dirty="0"/>
+          </a:p>
+        </p:txBody>
+      </p:sp>
+      <p:sp>
+        <p:nvSpPr>
+          <p:cNvPr id="6" name="Shape 4"/>
+          <p:cNvSpPr/>
+          <p:nvPr/>
+        </p:nvSpPr>
+        <p:spPr>
+          <a:xfrm>
+            <a:off x="1371600" y="1965960"/>
+            <a:ext cx="4114800" cy="7315"/>
+          </a:xfrm>
+          <a:prstGeom prst="rect">
+            <a:avLst/>
+          </a:prstGeom>
+          <a:solidFill>
+            <a:srgbClr val="E2E8F0"/>
+          </a:solidFill>
+          <a:ln/>
+        </p:spPr>
+      </p:sp>
+      <p:sp>
+        <p:nvSpPr>
+          <p:cNvPr id="7" name="Text 5"/>
+          <p:cNvSpPr/>
+          <p:nvPr/>
+        </p:nvSpPr>
+        <p:spPr>
+          <a:xfrm>
+            <a:off x="5852160" y="1417320"/>
+            <a:ext cx="1828800" cy="502920"/>
+          </a:xfrm>
+          <a:prstGeom prst="rect">
+            <a:avLst/>
+          </a:prstGeom>
+          <a:noFill/>
+          <a:ln/>
+        </p:spPr>
+        <p:txBody>
+          <a:bodyPr wrap="square" rtlCol="0" anchor="ctr"/>
+          <a:lstStyle/>
+          <a:p>
+            <a:pPr indent="0" marL="0">
+              <a:buNone/>
+            </a:pPr>
+            <a:r>
+              <a:rPr lang="en-US" sz="900" b="1" spc="100" kern="0" dirty="0">
+                <a:solidFill>
+                  <a:srgbClr val="94A3B8"/>
+                </a:solidFill>
+                <a:latin typeface="Calibri" pitchFamily="34" charset="0"/>
+                <a:ea typeface="Calibri" pitchFamily="34" charset="-122"/>
+                <a:cs typeface="Calibri" pitchFamily="34" charset="-120"/>
+              </a:rPr>
+              <a:t>{{csv_kpi_1_label}}</a:t>
+            </a:r>
+            <a:endParaRPr lang="en-US" sz="900" dirty="0"/>
+          </a:p>
+        </p:txBody>
+      </p:sp>
+      <p:sp>
+        <p:nvSpPr>
+          <p:cNvPr id="8" name="Text 6"/>
+          <p:cNvSpPr/>
+          <p:nvPr/>
+        </p:nvSpPr>
+        <p:spPr>
+          <a:xfrm>
+            <a:off x="7772400" y="1417320"/>
+            <a:ext cx="2194560" cy="502920"/>
+          </a:xfrm>
+          <a:prstGeom prst="rect">
+            <a:avLst/>
+          </a:prstGeom>
+          <a:noFill/>
+          <a:ln/>
+        </p:spPr>
+        <p:txBody>
+          <a:bodyPr wrap="square" rtlCol="0" anchor="ctr"/>
+          <a:lstStyle/>
+          <a:p>
+            <a:pPr indent="0" marL="0">
+              <a:buNone/>
+            </a:pPr>
+            <a:r>
+              <a:rPr lang="en-US" sz="1800" b="1" dirty="0">
+                <a:solidFill>
+                  <a:srgbClr val="0F172A"/>
+                </a:solidFill>
+                <a:latin typeface="Calibri" pitchFamily="34" charset="0"/>
+                <a:ea typeface="Calibri" pitchFamily="34" charset="-122"/>
+                <a:cs typeface="Calibri" pitchFamily="34" charset="-120"/>
+              </a:rPr>
+              <a:t>{{csv_kpi_1_value}}</a:t>
+            </a:r>
+            <a:endParaRPr lang="en-US" sz="1800" dirty="0"/>
+          </a:p>
+        </p:txBody>
+      </p:sp>
+      <p:sp>
+        <p:nvSpPr>
+          <p:cNvPr id="9" name="Shape 7"/>
+          <p:cNvSpPr/>
+          <p:nvPr/>
+        </p:nvSpPr>
+        <p:spPr>
+          <a:xfrm>
+            <a:off x="5852160" y="1965960"/>
+            <a:ext cx="4114800" cy="7315"/>
+          </a:xfrm>
+          <a:prstGeom prst="rect">
+            <a:avLst/>
+          </a:prstGeom>
+          <a:solidFill>
+            <a:srgbClr val="E2E8F0"/>
+          </a:solidFill>
+          <a:ln/>
+        </p:spPr>
+      </p:sp>
+      <p:sp>
+        <p:nvSpPr>
+          <p:cNvPr id="10" name="Text 8"/>
+          <p:cNvSpPr/>
+          <p:nvPr/>
+        </p:nvSpPr>
+        <p:spPr>
+          <a:xfrm>
+            <a:off x="1371600" y="2029968"/>
+            <a:ext cx="1828800" cy="502920"/>
+          </a:xfrm>
+          <a:prstGeom prst="rect">
+            <a:avLst/>
+          </a:prstGeom>
+          <a:noFill/>
+          <a:ln/>
+        </p:spPr>
+        <p:txBody>
+          <a:bodyPr wrap="square" rtlCol="0" anchor="ctr"/>
+          <a:lstStyle/>
+          <a:p>
+            <a:pPr indent="0" marL="0">
+              <a:buNone/>
+            </a:pPr>
+            <a:r>
+              <a:rPr lang="en-US" sz="900" b="1" spc="100" kern="0" dirty="0">
+                <a:solidFill>
+                  <a:srgbClr val="94A3B8"/>
+                </a:solidFill>
+                <a:latin typeface="Calibri" pitchFamily="34" charset="0"/>
+                <a:ea typeface="Calibri" pitchFamily="34" charset="-122"/>
+                <a:cs typeface="Calibri" pitchFamily="34" charset="-120"/>
+              </a:rPr>
+              <a:t>{{csv_kpi_2_label}}</a:t>
+            </a:r>
+            <a:endParaRPr lang="en-US" sz="900" dirty="0"/>
+          </a:p>
+        </p:txBody>
+      </p:sp>
+      <p:sp>
+        <p:nvSpPr>
+          <p:cNvPr id="11" name="Text 9"/>
+          <p:cNvSpPr/>
+          <p:nvPr/>
+        </p:nvSpPr>
+        <p:spPr>
+          <a:xfrm>
+            <a:off x="3291840" y="2029968"/>
+            <a:ext cx="2194560" cy="502920"/>
+          </a:xfrm>
+          <a:prstGeom prst="rect">
+            <a:avLst/>
+          </a:prstGeom>
+          <a:noFill/>
+          <a:ln/>
+        </p:spPr>
+        <p:txBody>
+          <a:bodyPr wrap="square" rtlCol="0" anchor="ctr"/>
+          <a:lstStyle/>
+          <a:p>
+            <a:pPr indent="0" marL="0">
+              <a:buNone/>
+            </a:pPr>
+            <a:r>
+              <a:rPr lang="en-US" sz="1800" b="1" dirty="0">
+                <a:solidFill>
+                  <a:srgbClr val="0F172A"/>
+                </a:solidFill>
+                <a:latin typeface="Calibri" pitchFamily="34" charset="0"/>
+                <a:ea typeface="Calibri" pitchFamily="34" charset="-122"/>
+                <a:cs typeface="Calibri" pitchFamily="34" charset="-120"/>
+              </a:rPr>
+              <a:t>{{csv_kpi_2_value}}</a:t>
+            </a:r>
+            <a:endParaRPr lang="en-US" sz="1800" dirty="0"/>
+          </a:p>
+        </p:txBody>
+      </p:sp>
+      <p:sp>
+        <p:nvSpPr>
+          <p:cNvPr id="12" name="Shape 10"/>
+          <p:cNvSpPr/>
+          <p:nvPr/>
+        </p:nvSpPr>
+        <p:spPr>
+          <a:xfrm>
+            <a:off x="1371600" y="2578608"/>
+            <a:ext cx="4114800" cy="7315"/>
+          </a:xfrm>
+          <a:prstGeom prst="rect">
+            <a:avLst/>
+          </a:prstGeom>
+          <a:solidFill>
+            <a:srgbClr val="E2E8F0"/>
+          </a:solidFill>
+          <a:ln/>
+        </p:spPr>
+      </p:sp>
+      <p:sp>
+        <p:nvSpPr>
+          <p:cNvPr id="13" name="Text 11"/>
+          <p:cNvSpPr/>
+          <p:nvPr/>
+        </p:nvSpPr>
+        <p:spPr>
+          <a:xfrm>
+            <a:off x="5852160" y="2029968"/>
+            <a:ext cx="1828800" cy="502920"/>
+          </a:xfrm>
+          <a:prstGeom prst="rect">
+            <a:avLst/>
+          </a:prstGeom>
+          <a:noFill/>
+          <a:ln/>
+        </p:spPr>
+        <p:txBody>
+          <a:bodyPr wrap="square" rtlCol="0" anchor="ctr"/>
+          <a:lstStyle/>
+          <a:p>
+            <a:pPr indent="0" marL="0">
+              <a:buNone/>
+            </a:pPr>
+            <a:r>
+              <a:rPr lang="en-US" sz="900" b="1" spc="100" kern="0" dirty="0">
+                <a:solidFill>
+                  <a:srgbClr val="94A3B8"/>
+                </a:solidFill>
+                <a:latin typeface="Calibri" pitchFamily="34" charset="0"/>
+                <a:ea typeface="Calibri" pitchFamily="34" charset="-122"/>
+                <a:cs typeface="Calibri" pitchFamily="34" charset="-120"/>
+              </a:rPr>
+              <a:t>{{csv_kpi_3_label}}</a:t>
+            </a:r>
+            <a:endParaRPr lang="en-US" sz="900" dirty="0"/>
+          </a:p>
+        </p:txBody>
+      </p:sp>
+      <p:sp>
+        <p:nvSpPr>
+          <p:cNvPr id="14" name="Text 12"/>
+          <p:cNvSpPr/>
+          <p:nvPr/>
+        </p:nvSpPr>
+        <p:spPr>
+          <a:xfrm>
+            <a:off x="7772400" y="2029968"/>
+            <a:ext cx="2194560" cy="502920"/>
+          </a:xfrm>
+          <a:prstGeom prst="rect">
+            <a:avLst/>
+          </a:prstGeom>
+          <a:noFill/>
+          <a:ln/>
+        </p:spPr>
+        <p:txBody>
+          <a:bodyPr wrap="square" rtlCol="0" anchor="ctr"/>
+          <a:lstStyle/>
+          <a:p>
+            <a:pPr indent="0" marL="0">
+              <a:buNone/>
+            </a:pPr>
+            <a:r>
+              <a:rPr lang="en-US" sz="1800" b="1" dirty="0">
+                <a:solidFill>
+                  <a:srgbClr val="0F172A"/>
+                </a:solidFill>
+                <a:latin typeface="Calibri" pitchFamily="34" charset="0"/>
+                <a:ea typeface="Calibri" pitchFamily="34" charset="-122"/>
+                <a:cs typeface="Calibri" pitchFamily="34" charset="-120"/>
+              </a:rPr>
+              <a:t>{{csv_kpi_3_value}}</a:t>
+            </a:r>
+            <a:endParaRPr lang="en-US" sz="1800" dirty="0"/>
+          </a:p>
+        </p:txBody>
+      </p:sp>
+      <p:sp>
+        <p:nvSpPr>
+          <p:cNvPr id="15" name="Shape 13"/>
+          <p:cNvSpPr/>
+          <p:nvPr/>
+        </p:nvSpPr>
+        <p:spPr>
+          <a:xfrm>
+            <a:off x="5852160" y="2578608"/>
+            <a:ext cx="4114800" cy="7315"/>
+          </a:xfrm>
+          <a:prstGeom prst="rect">
+            <a:avLst/>
+          </a:prstGeom>
+          <a:solidFill>
+            <a:srgbClr val="E2E8F0"/>
+          </a:solidFill>
+          <a:ln/>
+        </p:spPr>
+      </p:sp>
+      <p:sp>
+        <p:nvSpPr>
+          <p:cNvPr id="16" name="Text 14"/>
+          <p:cNvSpPr/>
+          <p:nvPr/>
+        </p:nvSpPr>
+        <p:spPr>
+          <a:xfrm>
+            <a:off x="1371600" y="2642616"/>
+            <a:ext cx="1828800" cy="502920"/>
+          </a:xfrm>
+          <a:prstGeom prst="rect">
+            <a:avLst/>
+          </a:prstGeom>
+          <a:noFill/>
+          <a:ln/>
+        </p:spPr>
+        <p:txBody>
+          <a:bodyPr wrap="square" rtlCol="0" anchor="ctr"/>
+          <a:lstStyle/>
+          <a:p>
+            <a:pPr indent="0" marL="0">
+              <a:buNone/>
+            </a:pPr>
+            <a:r>
+              <a:rPr lang="en-US" sz="900" b="1" spc="100" kern="0" dirty="0">
+                <a:solidFill>
+                  <a:srgbClr val="94A3B8"/>
+                </a:solidFill>
+                <a:latin typeface="Calibri" pitchFamily="34" charset="0"/>
+                <a:ea typeface="Calibri" pitchFamily="34" charset="-122"/>
+                <a:cs typeface="Calibri" pitchFamily="34" charset="-120"/>
+              </a:rPr>
+              <a:t>{{csv_kpi_4_label}}</a:t>
+            </a:r>
+            <a:endParaRPr lang="en-US" sz="900" dirty="0"/>
+          </a:p>
+        </p:txBody>
+      </p:sp>
+      <p:sp>
+        <p:nvSpPr>
+          <p:cNvPr id="17" name="Text 15"/>
+          <p:cNvSpPr/>
+          <p:nvPr/>
+        </p:nvSpPr>
+        <p:spPr>
+          <a:xfrm>
+            <a:off x="3291840" y="2642616"/>
+            <a:ext cx="2194560" cy="502920"/>
+          </a:xfrm>
+          <a:prstGeom prst="rect">
+            <a:avLst/>
+          </a:prstGeom>
+          <a:noFill/>
+          <a:ln/>
+        </p:spPr>
+        <p:txBody>
+          <a:bodyPr wrap="square" rtlCol="0" anchor="ctr"/>
+          <a:lstStyle/>
+          <a:p>
+            <a:pPr indent="0" marL="0">
+              <a:buNone/>
+            </a:pPr>
+            <a:r>
+              <a:rPr lang="en-US" sz="1800" b="1" dirty="0">
+                <a:solidFill>
+                  <a:srgbClr val="0F172A"/>
+                </a:solidFill>
+                <a:latin typeface="Calibri" pitchFamily="34" charset="0"/>
+                <a:ea typeface="Calibri" pitchFamily="34" charset="-122"/>
+                <a:cs typeface="Calibri" pitchFamily="34" charset="-120"/>
+              </a:rPr>
+              <a:t>{{csv_kpi_4_value}}</a:t>
+            </a:r>
+            <a:endParaRPr lang="en-US" sz="1800" dirty="0"/>
+          </a:p>
+        </p:txBody>
+      </p:sp>
+      <p:sp>
+        <p:nvSpPr>
+          <p:cNvPr id="18" name="Shape 16"/>
+          <p:cNvSpPr/>
+          <p:nvPr/>
+        </p:nvSpPr>
+        <p:spPr>
+          <a:xfrm>
+            <a:off x="1371600" y="3191256"/>
+            <a:ext cx="4114800" cy="7315"/>
+          </a:xfrm>
+          <a:prstGeom prst="rect">
+            <a:avLst/>
+          </a:prstGeom>
+          <a:solidFill>
+            <a:srgbClr val="E2E8F0"/>
+          </a:solidFill>
+          <a:ln/>
+        </p:spPr>
+      </p:sp>
+      <p:sp>
+        <p:nvSpPr>
+          <p:cNvPr id="19" name="Text 17"/>
+          <p:cNvSpPr/>
+          <p:nvPr/>
+        </p:nvSpPr>
+        <p:spPr>
+          <a:xfrm>
+            <a:off x="5852160" y="2642616"/>
+            <a:ext cx="1828800" cy="502920"/>
+          </a:xfrm>
+          <a:prstGeom prst="rect">
+            <a:avLst/>
+          </a:prstGeom>
+          <a:noFill/>
+          <a:ln/>
+        </p:spPr>
+        <p:txBody>
+          <a:bodyPr wrap="square" rtlCol="0" anchor="ctr"/>
+          <a:lstStyle/>
+          <a:p>
+            <a:pPr indent="0" marL="0">
+              <a:buNone/>
+            </a:pPr>
+            <a:r>
+              <a:rPr lang="en-US" sz="900" b="1" spc="100" kern="0" dirty="0">
+                <a:solidFill>
+                  <a:srgbClr val="94A3B8"/>
+                </a:solidFill>
+                <a:latin typeface="Calibri" pitchFamily="34" charset="0"/>
+                <a:ea typeface="Calibri" pitchFamily="34" charset="-122"/>
+                <a:cs typeface="Calibri" pitchFamily="34" charset="-120"/>
+              </a:rPr>
+              <a:t>{{csv_kpi_5_label}}</a:t>
+            </a:r>
+            <a:endParaRPr lang="en-US" sz="900" dirty="0"/>
+          </a:p>
+        </p:txBody>
+      </p:sp>
+      <p:sp>
+        <p:nvSpPr>
+          <p:cNvPr id="20" name="Text 18"/>
+          <p:cNvSpPr/>
+          <p:nvPr/>
+        </p:nvSpPr>
+        <p:spPr>
+          <a:xfrm>
+            <a:off x="7772400" y="2642616"/>
+            <a:ext cx="2194560" cy="502920"/>
+          </a:xfrm>
+          <a:prstGeom prst="rect">
+            <a:avLst/>
+          </a:prstGeom>
+          <a:noFill/>
+          <a:ln/>
+        </p:spPr>
+        <p:txBody>
+          <a:bodyPr wrap="square" rtlCol="0" anchor="ctr"/>
+          <a:lstStyle/>
+          <a:p>
+            <a:pPr indent="0" marL="0">
+              <a:buNone/>
+            </a:pPr>
+            <a:r>
+              <a:rPr lang="en-US" sz="1800" b="1" dirty="0">
+                <a:solidFill>
+                  <a:srgbClr val="0F172A"/>
+                </a:solidFill>
+                <a:latin typeface="Calibri" pitchFamily="34" charset="0"/>
+                <a:ea typeface="Calibri" pitchFamily="34" charset="-122"/>
+                <a:cs typeface="Calibri" pitchFamily="34" charset="-120"/>
+              </a:rPr>
+              <a:t>{{csv_kpi_5_value}}</a:t>
+            </a:r>
+            <a:endParaRPr lang="en-US" sz="1800" dirty="0"/>
+          </a:p>
+        </p:txBody>
+      </p:sp>
+      <p:sp>
+        <p:nvSpPr>
+          <p:cNvPr id="21" name="Shape 19"/>
+          <p:cNvSpPr/>
+          <p:nvPr/>
+        </p:nvSpPr>
+        <p:spPr>
+          <a:xfrm>
+            <a:off x="5852160" y="3191256"/>
+            <a:ext cx="4114800" cy="7315"/>
+          </a:xfrm>
+          <a:prstGeom prst="rect">
+            <a:avLst/>
+          </a:prstGeom>
+          <a:solidFill>
+            <a:srgbClr val="E2E8F0"/>
+          </a:solidFill>
+          <a:ln/>
+        </p:spPr>
+      </p:sp>
+      <p:sp>
+        <p:nvSpPr>
+          <p:cNvPr id="22" name="Text 20"/>
+          <p:cNvSpPr/>
+          <p:nvPr/>
+        </p:nvSpPr>
+        <p:spPr>
+          <a:xfrm>
+            <a:off x="1371600" y="3337560"/>
+            <a:ext cx="9418320" cy="2606040"/>
+          </a:xfrm>
+          <a:prstGeom prst="rect">
+            <a:avLst/>
+          </a:prstGeom>
+          <a:noFill/>
+          <a:ln/>
+        </p:spPr>
+        <p:txBody>
+          <a:bodyPr wrap="square" rtlCol="0" anchor="ctr"/>
+          <a:lstStyle/>
+          <a:p>
+            <a:pPr algn="ctr" indent="0" marL="0">
+              <a:buNone/>
+            </a:pPr>
+            <a:r>
+              <a:rPr lang="en-US" sz="1000" dirty="0">
+                <a:solidFill>
+                  <a:srgbClr val="94A3B8"/>
+                </a:solidFill>
+                <a:latin typeface="Calibri" pitchFamily="34" charset="0"/>
+                <a:ea typeface="Calibri" pitchFamily="34" charset="-122"/>
+                <a:cs typeface="Calibri" pitchFamily="34" charset="-120"/>
+              </a:rPr>
+              <a:t>{{chart_csv_data}}</a:t>
+            </a:r>
+            <a:endParaRPr lang="en-US" sz="1000" dirty="0"/>
+          </a:p>
+        </p:txBody>
+      </p:sp>
+      <p:sp>
+        <p:nvSpPr>
+          <p:cNvPr id="23" name="Shape 21"/>
+          <p:cNvSpPr/>
+          <p:nvPr/>
+        </p:nvSpPr>
+        <p:spPr>
+          <a:xfrm>
+            <a:off x="1371600" y="6355080"/>
+            <a:ext cx="9418320" cy="4572"/>
+          </a:xfrm>
+          <a:prstGeom prst="rect">
+            <a:avLst/>
+          </a:prstGeom>
+          <a:solidFill>
+            <a:srgbClr val="E2E8F0"/>
+          </a:solidFill>
+          <a:ln/>
+        </p:spPr>
+      </p:sp>
+      <p:sp>
+        <p:nvSpPr>
+          <p:cNvPr id="24" name="Text 22"/>
+          <p:cNvSpPr/>
+          <p:nvPr/>
+        </p:nvSpPr>
+        <p:spPr>
+          <a:xfrm>
+            <a:off x="1371600" y="6446520"/>
+            <a:ext cx="9418320" cy="256032"/>
+          </a:xfrm>
+          <a:prstGeom prst="rect">
+            <a:avLst/>
+          </a:prstGeom>
+          <a:noFill/>
+          <a:ln/>
+        </p:spPr>
+        <p:txBody>
+          <a:bodyPr wrap="square" rtlCol="0" anchor="ctr"/>
+          <a:lstStyle/>
+          <a:p>
+            <a:pPr algn="ctr" indent="0" marL="0">
+              <a:buNone/>
+            </a:pPr>
+            <a:r>
+              <a:rPr lang="en-US" sz="700" dirty="0">
+                <a:solidFill>
+                  <a:srgbClr val="94A3B8"/>
+                </a:solidFill>
+                <a:latin typeface="Calibri" pitchFamily="34" charset="0"/>
+                <a:ea typeface="Calibri" pitchFamily="34" charset="-122"/>
+                <a:cs typeface="Calibri" pitchFamily="34" charset="-120"/>
+              </a:rPr>
+              <a:t>{{agency_name}}  •  Page 14</a:t>
+            </a:r>
+            <a:endParaRPr lang="en-US" sz="700" dirty="0"/>
+          </a:p>
+        </p:txBody>
+      </p:sp>
+    </p:spTree>
+  </p:cSld>
+  <p:clrMapOvr>
+    <a:masterClrMapping/>
+  </p:clrMapOvr>
+</p:sld>
+</file>
+
+<file path=ppt/slides/slide15.xml><?xml version="1.0" encoding="utf-8"?>
+<p:sld xmlns:a="http://schemas.openxmlformats.org/drawingml/2006/main" xmlns:r="http://schemas.openxmlformats.org/officeDocument/2006/relationships" xmlns:p="http://schemas.openxmlformats.org/presentationml/2006/main">
+  <p:cSld name="Slide 15">
+    <p:bg>
+      <p:bgPr>
+        <a:solidFill>
+          <a:srgbClr val="FFFFFF"/>
+        </a:solidFill>
+      </p:bgPr>
+    </p:bg>
+    <p:spTree>
+      <p:nvGrpSpPr>
+        <p:cNvPr id="1" name=""/>
+        <p:cNvGrpSpPr/>
+        <p:nvPr/>
+      </p:nvGrpSpPr>
+      <p:grpSpPr>
+        <a:xfrm>
+          <a:off x="0" y="0"/>
+          <a:ext cx="0" cy="0"/>
+          <a:chOff x="0" y="0"/>
+          <a:chExt cx="0" cy="0"/>
+        </a:xfrm>
+      </p:grpSpPr>
+      <p:sp>
+        <p:nvSpPr>
+          <p:cNvPr id="2" name="Text 0"/>
+          <p:cNvSpPr/>
+          <p:nvPr/>
+        </p:nvSpPr>
+        <p:spPr>
+          <a:xfrm>
+            <a:off x="1371600" y="548640"/>
+            <a:ext cx="9418320" cy="640080"/>
+          </a:xfrm>
+          <a:prstGeom prst="rect">
+            <a:avLst/>
+          </a:prstGeom>
+          <a:noFill/>
+          <a:ln/>
+        </p:spPr>
+        <p:txBody>
+          <a:bodyPr wrap="square" lIns="0" tIns="0" rIns="0" bIns="0" rtlCol="0" anchor="ctr"/>
+          <a:lstStyle/>
+          <a:p>
+            <a:pPr indent="0" marL="0">
+              <a:buNone/>
+            </a:pPr>
+            <a:r>
+              <a:rPr lang="en-US" sz="2600" dirty="0">
+                <a:solidFill>
+                  <a:srgbClr val="0F172A"/>
+                </a:solidFill>
+                <a:latin typeface="Georgia" pitchFamily="34" charset="0"/>
+                <a:ea typeface="Georgia" pitchFamily="34" charset="-122"/>
+                <a:cs typeface="Georgia" pitchFamily="34" charset="-120"/>
+              </a:rPr>
+              <a:t>Conversion Funnel</a:t>
+            </a:r>
+            <a:endParaRPr lang="en-US" sz="2600" dirty="0"/>
+          </a:p>
+        </p:txBody>
+      </p:sp>
+      <p:sp>
+        <p:nvSpPr>
+          <p:cNvPr id="3" name="Shape 1"/>
+          <p:cNvSpPr/>
+          <p:nvPr/>
+        </p:nvSpPr>
+        <p:spPr>
+          <a:xfrm>
+            <a:off x="1371600" y="1234440"/>
+            <a:ext cx="1828800" cy="13716"/>
+          </a:xfrm>
+          <a:prstGeom prst="rect">
+            <a:avLst/>
+          </a:prstGeom>
+          <a:solidFill>
+            <a:srgbClr val="0F172A"/>
+          </a:solidFill>
+          <a:ln/>
+        </p:spPr>
+      </p:sp>
+      <p:sp>
+        <p:nvSpPr>
+          <p:cNvPr id="4" name="Text 2"/>
+          <p:cNvSpPr/>
+          <p:nvPr/>
+        </p:nvSpPr>
+        <p:spPr>
+          <a:xfrm>
+            <a:off x="1371600" y="1463040"/>
+            <a:ext cx="9418320" cy="3657600"/>
+          </a:xfrm>
+          <a:prstGeom prst="rect">
+            <a:avLst/>
+          </a:prstGeom>
+          <a:noFill/>
+          <a:ln/>
+        </p:spPr>
+        <p:txBody>
+          <a:bodyPr wrap="square" rtlCol="0" anchor="ctr"/>
+          <a:lstStyle/>
+          <a:p>
+            <a:pPr algn="ctr" indent="0" marL="0">
+              <a:buNone/>
+            </a:pPr>
+            <a:r>
+              <a:rPr lang="en-US" sz="1000" dirty="0">
+                <a:solidFill>
+                  <a:srgbClr val="94A3B8"/>
+                </a:solidFill>
+                <a:latin typeface="Calibri" pitchFamily="34" charset="0"/>
+                <a:ea typeface="Calibri" pitchFamily="34" charset="-122"/>
+                <a:cs typeface="Calibri" pitchFamily="34" charset="-120"/>
+              </a:rPr>
+              <a:t>{{chart_conversion_funnel}}</a:t>
+            </a:r>
+            <a:endParaRPr lang="en-US" sz="1000" dirty="0"/>
+          </a:p>
+        </p:txBody>
+      </p:sp>
+      <p:sp>
+        <p:nvSpPr>
+          <p:cNvPr id="5" name="Text 3"/>
+          <p:cNvSpPr/>
+          <p:nvPr/>
+        </p:nvSpPr>
+        <p:spPr>
+          <a:xfrm>
+            <a:off x="1371600" y="5394960"/>
+            <a:ext cx="9418320" cy="1097280"/>
+          </a:xfrm>
+          <a:prstGeom prst="rect">
+            <a:avLst/>
+          </a:prstGeom>
+          <a:noFill/>
+          <a:ln/>
+        </p:spPr>
+        <p:txBody>
+          <a:bodyPr wrap="square" rtlCol="0" anchor="t"/>
+          <a:lstStyle/>
+          <a:p>
+            <a:pPr indent="0" marL="0">
+              <a:lnSpc>
+                <a:spcPct val="140000"/>
+              </a:lnSpc>
+              <a:buNone/>
+            </a:pPr>
+            <a:r>
+              <a:rPr lang="en-US" sz="1200" dirty="0">
+                <a:solidFill>
+                  <a:srgbClr val="334155"/>
+                </a:solidFill>
+                <a:latin typeface="Calibri" pitchFamily="34" charset="0"/>
+                <a:ea typeface="Calibri" pitchFamily="34" charset="-122"/>
+                <a:cs typeface="Calibri" pitchFamily="34" charset="-120"/>
+              </a:rPr>
+              <a:t>{{website_narrative}}</a:t>
+            </a:r>
+            <a:endParaRPr lang="en-US" sz="1200" dirty="0"/>
+          </a:p>
+        </p:txBody>
+      </p:sp>
+      <p:sp>
+        <p:nvSpPr>
+          <p:cNvPr id="6" name="Shape 4"/>
+          <p:cNvSpPr/>
+          <p:nvPr/>
+        </p:nvSpPr>
+        <p:spPr>
+          <a:xfrm>
+            <a:off x="1371600" y="6355080"/>
+            <a:ext cx="9418320" cy="4572"/>
+          </a:xfrm>
+          <a:prstGeom prst="rect">
+            <a:avLst/>
+          </a:prstGeom>
+          <a:solidFill>
+            <a:srgbClr val="E2E8F0"/>
+          </a:solidFill>
+          <a:ln/>
+        </p:spPr>
+      </p:sp>
+      <p:sp>
+        <p:nvSpPr>
+          <p:cNvPr id="7" name="Text 5"/>
+          <p:cNvSpPr/>
+          <p:nvPr/>
+        </p:nvSpPr>
+        <p:spPr>
+          <a:xfrm>
+            <a:off x="1371600" y="6446520"/>
+            <a:ext cx="9418320" cy="256032"/>
+          </a:xfrm>
+          <a:prstGeom prst="rect">
+            <a:avLst/>
+          </a:prstGeom>
+          <a:noFill/>
+          <a:ln/>
+        </p:spPr>
+        <p:txBody>
+          <a:bodyPr wrap="square" rtlCol="0" anchor="ctr"/>
+          <a:lstStyle/>
+          <a:p>
+            <a:pPr algn="ctr" indent="0" marL="0">
+              <a:buNone/>
+            </a:pPr>
+            <a:r>
+              <a:rPr lang="en-US" sz="700" dirty="0">
+                <a:solidFill>
+                  <a:srgbClr val="94A3B8"/>
+                </a:solidFill>
+                <a:latin typeface="Calibri" pitchFamily="34" charset="0"/>
+                <a:ea typeface="Calibri" pitchFamily="34" charset="-122"/>
+                <a:cs typeface="Calibri" pitchFamily="34" charset="-120"/>
+              </a:rPr>
+              <a:t>{{agency_name}}  •  Page 15</a:t>
+            </a:r>
+            <a:endParaRPr lang="en-US" sz="700" dirty="0"/>
+          </a:p>
+        </p:txBody>
+      </p:sp>
+    </p:spTree>
+  </p:cSld>
+  <p:clrMapOvr>
+    <a:masterClrMapping/>
+  </p:clrMapOvr>
+</p:sld>
+</file>
+
+<file path=ppt/slides/slide16.xml><?xml version="1.0" encoding="utf-8"?>
+<p:sld xmlns:a="http://schemas.openxmlformats.org/drawingml/2006/main" xmlns:r="http://schemas.openxmlformats.org/officeDocument/2006/relationships" xmlns:p="http://schemas.openxmlformats.org/presentationml/2006/main">
+  <p:cSld name="Slide 16">
+    <p:bg>
+      <p:bgPr>
+        <a:solidFill>
+          <a:srgbClr val="FFFFFF"/>
+        </a:solidFill>
+      </p:bgPr>
+    </p:bg>
+    <p:spTree>
+      <p:nvGrpSpPr>
+        <p:cNvPr id="1" name=""/>
+        <p:cNvGrpSpPr/>
+        <p:nvPr/>
+      </p:nvGrpSpPr>
+      <p:grpSpPr>
+        <a:xfrm>
+          <a:off x="0" y="0"/>
+          <a:ext cx="0" cy="0"/>
+          <a:chOff x="0" y="0"/>
+          <a:chExt cx="0" cy="0"/>
+        </a:xfrm>
+      </p:grpSpPr>
+      <p:sp>
+        <p:nvSpPr>
+          <p:cNvPr id="2" name="Text 0"/>
+          <p:cNvSpPr/>
+          <p:nvPr/>
+        </p:nvSpPr>
+        <p:spPr>
+          <a:xfrm>
+            <a:off x="1371600" y="548640"/>
+            <a:ext cx="9418320" cy="640080"/>
+          </a:xfrm>
+          <a:prstGeom prst="rect">
+            <a:avLst/>
+          </a:prstGeom>
+          <a:noFill/>
+          <a:ln/>
+        </p:spPr>
+        <p:txBody>
+          <a:bodyPr wrap="square" lIns="0" tIns="0" rIns="0" bIns="0" rtlCol="0" anchor="ctr"/>
+          <a:lstStyle/>
+          <a:p>
+            <a:pPr indent="0" marL="0">
+              <a:buNone/>
+            </a:pPr>
+            <a:r>
+              <a:rPr lang="en-US" sz="2600" dirty="0">
+                <a:solidFill>
+                  <a:srgbClr val="059669"/>
+                </a:solidFill>
+                <a:latin typeface="Georgia" pitchFamily="34" charset="0"/>
+                <a:ea typeface="Georgia" pitchFamily="34" charset="-122"/>
+                <a:cs typeface="Georgia" pitchFamily="34" charset="-120"/>
+              </a:rPr>
+              <a:t>Key Wins</a:t>
+            </a:r>
+            <a:endParaRPr lang="en-US" sz="2600" dirty="0"/>
+          </a:p>
+        </p:txBody>
+      </p:sp>
+      <p:sp>
+        <p:nvSpPr>
+          <p:cNvPr id="3" name="Shape 1"/>
+          <p:cNvSpPr/>
+          <p:nvPr/>
+        </p:nvSpPr>
+        <p:spPr>
+          <a:xfrm>
+            <a:off x="1371600" y="1234440"/>
+            <a:ext cx="1828800" cy="13716"/>
+          </a:xfrm>
+          <a:prstGeom prst="rect">
+            <a:avLst/>
+          </a:prstGeom>
+          <a:solidFill>
+            <a:srgbClr val="059669"/>
+          </a:solidFill>
+          <a:ln/>
+        </p:spPr>
+      </p:sp>
+      <p:sp>
+        <p:nvSpPr>
+          <p:cNvPr id="4" name="Text 2"/>
+          <p:cNvSpPr/>
+          <p:nvPr/>
+        </p:nvSpPr>
+        <p:spPr>
+          <a:xfrm>
+            <a:off x="1371600" y="1554480"/>
+            <a:ext cx="9418320" cy="4572000"/>
+          </a:xfrm>
+          <a:prstGeom prst="rect">
+            <a:avLst/>
+          </a:prstGeom>
+          <a:noFill/>
+          <a:ln/>
+        </p:spPr>
+        <p:txBody>
+          <a:bodyPr wrap="square" rtlCol="0" anchor="t"/>
+          <a:lstStyle/>
+          <a:p>
+            <a:pPr indent="0" marL="0">
+              <a:lnSpc>
+                <a:spcPct val="150000"/>
+              </a:lnSpc>
+              <a:buNone/>
+            </a:pPr>
+            <a:r>
+              <a:rPr lang="en-US" sz="1300" dirty="0">
+                <a:solidFill>
+                  <a:srgbClr val="334155"/>
+                </a:solidFill>
+                <a:latin typeface="Calibri" pitchFamily="34" charset="0"/>
+                <a:ea typeface="Calibri" pitchFamily="34" charset="-122"/>
+                <a:cs typeface="Calibri" pitchFamily="34" charset="-120"/>
+              </a:rPr>
+              <a:t>{{key_wins}}</a:t>
+            </a:r>
+            <a:endParaRPr lang="en-US" sz="1300" dirty="0"/>
+          </a:p>
+        </p:txBody>
+      </p:sp>
+      <p:sp>
+        <p:nvSpPr>
+          <p:cNvPr id="5" name="Shape 3"/>
+          <p:cNvSpPr/>
+          <p:nvPr/>
+        </p:nvSpPr>
+        <p:spPr>
+          <a:xfrm>
+            <a:off x="1371600" y="6355080"/>
+            <a:ext cx="9418320" cy="4572"/>
+          </a:xfrm>
+          <a:prstGeom prst="rect">
+            <a:avLst/>
+          </a:prstGeom>
+          <a:solidFill>
+            <a:srgbClr val="E2E8F0"/>
+          </a:solidFill>
+          <a:ln/>
+        </p:spPr>
+      </p:sp>
+      <p:sp>
+        <p:nvSpPr>
+          <p:cNvPr id="6" name="Text 4"/>
+          <p:cNvSpPr/>
+          <p:nvPr/>
+        </p:nvSpPr>
+        <p:spPr>
+          <a:xfrm>
+            <a:off x="1371600" y="6446520"/>
+            <a:ext cx="9418320" cy="256032"/>
+          </a:xfrm>
+          <a:prstGeom prst="rect">
+            <a:avLst/>
+          </a:prstGeom>
+          <a:noFill/>
+          <a:ln/>
+        </p:spPr>
+        <p:txBody>
+          <a:bodyPr wrap="square" rtlCol="0" anchor="ctr"/>
+          <a:lstStyle/>
+          <a:p>
+            <a:pPr algn="ctr" indent="0" marL="0">
+              <a:buNone/>
+            </a:pPr>
+            <a:r>
+              <a:rPr lang="en-US" sz="700" dirty="0">
+                <a:solidFill>
+                  <a:srgbClr val="94A3B8"/>
+                </a:solidFill>
+                <a:latin typeface="Calibri" pitchFamily="34" charset="0"/>
+                <a:ea typeface="Calibri" pitchFamily="34" charset="-122"/>
+                <a:cs typeface="Calibri" pitchFamily="34" charset="-120"/>
+              </a:rPr>
+              <a:t>{{agency_name}}  •  Page 16</a:t>
+            </a:r>
+            <a:endParaRPr lang="en-US" sz="700" dirty="0"/>
+          </a:p>
+        </p:txBody>
+      </p:sp>
+    </p:spTree>
+  </p:cSld>
+  <p:clrMapOvr>
+    <a:masterClrMapping/>
+  </p:clrMapOvr>
+</p:sld>
+</file>
+
+<file path=ppt/slides/slide17.xml><?xml version="1.0" encoding="utf-8"?>
+<p:sld xmlns:a="http://schemas.openxmlformats.org/drawingml/2006/main" xmlns:r="http://schemas.openxmlformats.org/officeDocument/2006/relationships" xmlns:p="http://schemas.openxmlformats.org/presentationml/2006/main">
+  <p:cSld name="Slide 17">
+    <p:bg>
+      <p:bgPr>
+        <a:solidFill>
+          <a:srgbClr val="FFFFFF"/>
+        </a:solidFill>
+      </p:bgPr>
+    </p:bg>
+    <p:spTree>
+      <p:nvGrpSpPr>
+        <p:cNvPr id="1" name=""/>
+        <p:cNvGrpSpPr/>
+        <p:nvPr/>
+      </p:nvGrpSpPr>
+      <p:grpSpPr>
+        <a:xfrm>
+          <a:off x="0" y="0"/>
+          <a:ext cx="0" cy="0"/>
+          <a:chOff x="0" y="0"/>
+          <a:chExt cx="0" cy="0"/>
+        </a:xfrm>
+      </p:grpSpPr>
+      <p:sp>
+        <p:nvSpPr>
+          <p:cNvPr id="2" name="Text 0"/>
+          <p:cNvSpPr/>
+          <p:nvPr/>
+        </p:nvSpPr>
+        <p:spPr>
+          <a:xfrm>
+            <a:off x="1371600" y="548640"/>
+            <a:ext cx="9418320" cy="640080"/>
+          </a:xfrm>
+          <a:prstGeom prst="rect">
+            <a:avLst/>
+          </a:prstGeom>
+          <a:noFill/>
+          <a:ln/>
+        </p:spPr>
+        <p:txBody>
+          <a:bodyPr wrap="square" lIns="0" tIns="0" rIns="0" bIns="0" rtlCol="0" anchor="ctr"/>
+          <a:lstStyle/>
+          <a:p>
+            <a:pPr indent="0" marL="0">
+              <a:buNone/>
+            </a:pPr>
+            <a:r>
+              <a:rPr lang="en-US" sz="2600" dirty="0">
+                <a:solidFill>
+                  <a:srgbClr val="D97706"/>
+                </a:solidFill>
+                <a:latin typeface="Georgia" pitchFamily="34" charset="0"/>
+                <a:ea typeface="Georgia" pitchFamily="34" charset="-122"/>
+                <a:cs typeface="Georgia" pitchFamily="34" charset="-120"/>
+              </a:rPr>
+              <a:t>Concerns &amp; Recommendations</a:t>
+            </a:r>
+            <a:endParaRPr lang="en-US" sz="2600" dirty="0"/>
+          </a:p>
+        </p:txBody>
+      </p:sp>
+      <p:sp>
+        <p:nvSpPr>
+          <p:cNvPr id="3" name="Shape 1"/>
+          <p:cNvSpPr/>
+          <p:nvPr/>
+        </p:nvSpPr>
+        <p:spPr>
+          <a:xfrm>
+            <a:off x="1371600" y="1234440"/>
+            <a:ext cx="1828800" cy="13716"/>
+          </a:xfrm>
+          <a:prstGeom prst="rect">
+            <a:avLst/>
+          </a:prstGeom>
+          <a:solidFill>
+            <a:srgbClr val="D97706"/>
+          </a:solidFill>
+          <a:ln/>
+        </p:spPr>
+      </p:sp>
+      <p:sp>
+        <p:nvSpPr>
+          <p:cNvPr id="4" name="Text 2"/>
+          <p:cNvSpPr/>
+          <p:nvPr/>
+        </p:nvSpPr>
+        <p:spPr>
+          <a:xfrm>
+            <a:off x="1371600" y="1554480"/>
+            <a:ext cx="9418320" cy="4572000"/>
+          </a:xfrm>
+          <a:prstGeom prst="rect">
+            <a:avLst/>
+          </a:prstGeom>
+          <a:noFill/>
+          <a:ln/>
+        </p:spPr>
+        <p:txBody>
+          <a:bodyPr wrap="square" rtlCol="0" anchor="t"/>
+          <a:lstStyle/>
+          <a:p>
+            <a:pPr indent="0" marL="0">
+              <a:lnSpc>
+                <a:spcPct val="150000"/>
+              </a:lnSpc>
+              <a:buNone/>
+            </a:pPr>
+            <a:r>
+              <a:rPr lang="en-US" sz="1300" dirty="0">
+                <a:solidFill>
+                  <a:srgbClr val="334155"/>
+                </a:solidFill>
+                <a:latin typeface="Calibri" pitchFamily="34" charset="0"/>
+                <a:ea typeface="Calibri" pitchFamily="34" charset="-122"/>
+                <a:cs typeface="Calibri" pitchFamily="34" charset="-120"/>
+              </a:rPr>
+              <a:t>{{concerns}}</a:t>
+            </a:r>
+            <a:endParaRPr lang="en-US" sz="1300" dirty="0"/>
+          </a:p>
+        </p:txBody>
+      </p:sp>
+      <p:sp>
+        <p:nvSpPr>
+          <p:cNvPr id="5" name="Shape 3"/>
+          <p:cNvSpPr/>
+          <p:nvPr/>
+        </p:nvSpPr>
+        <p:spPr>
+          <a:xfrm>
+            <a:off x="1371600" y="6355080"/>
+            <a:ext cx="9418320" cy="4572"/>
+          </a:xfrm>
+          <a:prstGeom prst="rect">
+            <a:avLst/>
+          </a:prstGeom>
+          <a:solidFill>
+            <a:srgbClr val="E2E8F0"/>
+          </a:solidFill>
+          <a:ln/>
+        </p:spPr>
+      </p:sp>
+      <p:sp>
+        <p:nvSpPr>
+          <p:cNvPr id="6" name="Text 4"/>
+          <p:cNvSpPr/>
+          <p:nvPr/>
+        </p:nvSpPr>
+        <p:spPr>
+          <a:xfrm>
+            <a:off x="1371600" y="6446520"/>
+            <a:ext cx="9418320" cy="256032"/>
+          </a:xfrm>
+          <a:prstGeom prst="rect">
+            <a:avLst/>
+          </a:prstGeom>
+          <a:noFill/>
+          <a:ln/>
+        </p:spPr>
+        <p:txBody>
+          <a:bodyPr wrap="square" rtlCol="0" anchor="ctr"/>
+          <a:lstStyle/>
+          <a:p>
+            <a:pPr algn="ctr" indent="0" marL="0">
+              <a:buNone/>
+            </a:pPr>
+            <a:r>
+              <a:rPr lang="en-US" sz="700" dirty="0">
+                <a:solidFill>
+                  <a:srgbClr val="94A3B8"/>
+                </a:solidFill>
+                <a:latin typeface="Calibri" pitchFamily="34" charset="0"/>
+                <a:ea typeface="Calibri" pitchFamily="34" charset="-122"/>
+                <a:cs typeface="Calibri" pitchFamily="34" charset="-120"/>
+              </a:rPr>
+              <a:t>{{agency_name}}  •  Page 17</a:t>
+            </a:r>
+            <a:endParaRPr lang="en-US" sz="700" dirty="0"/>
+          </a:p>
+        </p:txBody>
+      </p:sp>
+    </p:spTree>
+  </p:cSld>
+  <p:clrMapOvr>
+    <a:masterClrMapping/>
+  </p:clrMapOvr>
+</p:sld>
+</file>
+
+<file path=ppt/slides/slide18.xml><?xml version="1.0" encoding="utf-8"?>
+<p:sld xmlns:a="http://schemas.openxmlformats.org/drawingml/2006/main" xmlns:r="http://schemas.openxmlformats.org/officeDocument/2006/relationships" xmlns:p="http://schemas.openxmlformats.org/presentationml/2006/main">
+  <p:cSld name="Slide 18">
+    <p:bg>
+      <p:bgPr>
+        <a:solidFill>
+          <a:srgbClr val="FFFFFF"/>
+        </a:solidFill>
+      </p:bgPr>
+    </p:bg>
+    <p:spTree>
+      <p:nvGrpSpPr>
+        <p:cNvPr id="1" name=""/>
+        <p:cNvGrpSpPr/>
+        <p:nvPr/>
+      </p:nvGrpSpPr>
+      <p:grpSpPr>
+        <a:xfrm>
+          <a:off x="0" y="0"/>
+          <a:ext cx="0" cy="0"/>
+          <a:chOff x="0" y="0"/>
+          <a:chExt cx="0" cy="0"/>
+        </a:xfrm>
+      </p:grpSpPr>
+      <p:sp>
+        <p:nvSpPr>
+          <p:cNvPr id="2" name="Text 0"/>
+          <p:cNvSpPr/>
+          <p:nvPr/>
+        </p:nvSpPr>
+        <p:spPr>
+          <a:xfrm>
+            <a:off x="1371600" y="548640"/>
+            <a:ext cx="9418320" cy="640080"/>
+          </a:xfrm>
+          <a:prstGeom prst="rect">
+            <a:avLst/>
+          </a:prstGeom>
+          <a:noFill/>
+          <a:ln/>
+        </p:spPr>
+        <p:txBody>
+          <a:bodyPr wrap="square" lIns="0" tIns="0" rIns="0" bIns="0" rtlCol="0" anchor="ctr"/>
+          <a:lstStyle/>
+          <a:p>
+            <a:pPr indent="0" marL="0">
+              <a:buNone/>
+            </a:pPr>
+            <a:r>
+              <a:rPr lang="en-US" sz="2600" dirty="0">
+                <a:solidFill>
+                  <a:srgbClr val="0F172A"/>
+                </a:solidFill>
+                <a:latin typeface="Georgia" pitchFamily="34" charset="0"/>
+                <a:ea typeface="Georgia" pitchFamily="34" charset="-122"/>
+                <a:cs typeface="Georgia" pitchFamily="34" charset="-120"/>
+              </a:rPr>
+              <a:t>Next Steps</a:t>
+            </a:r>
+            <a:endParaRPr lang="en-US" sz="2600" dirty="0"/>
+          </a:p>
+        </p:txBody>
+      </p:sp>
+      <p:sp>
+        <p:nvSpPr>
+          <p:cNvPr id="3" name="Shape 1"/>
+          <p:cNvSpPr/>
+          <p:nvPr/>
+        </p:nvSpPr>
+        <p:spPr>
+          <a:xfrm>
+            <a:off x="1371600" y="1234440"/>
+            <a:ext cx="1828800" cy="13716"/>
+          </a:xfrm>
+          <a:prstGeom prst="rect">
+            <a:avLst/>
+          </a:prstGeom>
+          <a:solidFill>
+            <a:srgbClr val="0F172A"/>
+          </a:solidFill>
+          <a:ln/>
+        </p:spPr>
+      </p:sp>
+      <p:sp>
+        <p:nvSpPr>
+          <p:cNvPr id="4" name="Text 2"/>
+          <p:cNvSpPr/>
+          <p:nvPr/>
+        </p:nvSpPr>
+        <p:spPr>
+          <a:xfrm>
+            <a:off x="1371600" y="1554480"/>
+            <a:ext cx="9418320" cy="3657600"/>
+          </a:xfrm>
+          <a:prstGeom prst="rect">
+            <a:avLst/>
+          </a:prstGeom>
+          <a:noFill/>
+          <a:ln/>
+        </p:spPr>
+        <p:txBody>
+          <a:bodyPr wrap="square" rtlCol="0" anchor="t"/>
+          <a:lstStyle/>
+          <a:p>
+            <a:pPr indent="0" marL="0">
+              <a:lnSpc>
+                <a:spcPct val="150000"/>
+              </a:lnSpc>
+              <a:buNone/>
+            </a:pPr>
+            <a:r>
+              <a:rPr lang="en-US" sz="1300" dirty="0">
+                <a:solidFill>
+                  <a:srgbClr val="334155"/>
+                </a:solidFill>
+                <a:latin typeface="Calibri" pitchFamily="34" charset="0"/>
+                <a:ea typeface="Calibri" pitchFamily="34" charset="-122"/>
+                <a:cs typeface="Calibri" pitchFamily="34" charset="-120"/>
+              </a:rPr>
+              <a:t>{{next_steps}}</a:t>
+            </a:r>
+            <a:endParaRPr lang="en-US" sz="1300" dirty="0"/>
+          </a:p>
+        </p:txBody>
+      </p:sp>
+      <p:sp>
+        <p:nvSpPr>
+          <p:cNvPr id="5" name="Shape 3"/>
+          <p:cNvSpPr/>
+          <p:nvPr/>
+        </p:nvSpPr>
+        <p:spPr>
+          <a:xfrm>
+            <a:off x="1371600" y="5669280"/>
+            <a:ext cx="9418320" cy="9144"/>
+          </a:xfrm>
+          <a:prstGeom prst="rect">
+            <a:avLst/>
+          </a:prstGeom>
+          <a:solidFill>
+            <a:srgbClr val="0F172A"/>
+          </a:solidFill>
+          <a:ln/>
+        </p:spPr>
+      </p:sp>
+      <p:sp>
+        <p:nvSpPr>
+          <p:cNvPr id="6" name="Text 4"/>
+          <p:cNvSpPr/>
+          <p:nvPr/>
+        </p:nvSpPr>
+        <p:spPr>
+          <a:xfrm>
+            <a:off x="1371600" y="5852160"/>
+            <a:ext cx="9418320" cy="320040"/>
+          </a:xfrm>
+          <a:prstGeom prst="rect">
+            <a:avLst/>
+          </a:prstGeom>
+          <a:noFill/>
+          <a:ln/>
+        </p:spPr>
+        <p:txBody>
+          <a:bodyPr wrap="square" rtlCol="0" anchor="ctr"/>
+          <a:lstStyle/>
+          <a:p>
+            <a:pPr algn="ctr" indent="0" marL="0">
+              <a:buNone/>
+            </a:pPr>
+            <a:r>
+              <a:rPr lang="en-US" sz="1100" dirty="0">
+                <a:solidFill>
+                  <a:srgbClr val="64748B"/>
+                </a:solidFill>
+                <a:latin typeface="Calibri" pitchFamily="34" charset="0"/>
+                <a:ea typeface="Calibri" pitchFamily="34" charset="-122"/>
+                <a:cs typeface="Calibri" pitchFamily="34" charset="-120"/>
+              </a:rPr>
+              <a:t>Questions? {{agency_name}}  •  {{agency_email}}</a:t>
+            </a:r>
+            <a:endParaRPr lang="en-US" sz="1100" dirty="0"/>
+          </a:p>
+        </p:txBody>
+      </p:sp>
+      <p:sp>
+        <p:nvSpPr>
+          <p:cNvPr id="7" name="Shape 5"/>
+          <p:cNvSpPr/>
+          <p:nvPr/>
+        </p:nvSpPr>
+        <p:spPr>
+          <a:xfrm>
+            <a:off x="1371600" y="6355080"/>
+            <a:ext cx="9418320" cy="4572"/>
+          </a:xfrm>
+          <a:prstGeom prst="rect">
+            <a:avLst/>
+          </a:prstGeom>
+          <a:solidFill>
+            <a:srgbClr val="E2E8F0"/>
+          </a:solidFill>
+          <a:ln/>
+        </p:spPr>
+      </p:sp>
+      <p:sp>
+        <p:nvSpPr>
+          <p:cNvPr id="8" name="Text 6"/>
+          <p:cNvSpPr/>
+          <p:nvPr/>
+        </p:nvSpPr>
+        <p:spPr>
+          <a:xfrm>
+            <a:off x="1371600" y="6446520"/>
+            <a:ext cx="9418320" cy="256032"/>
+          </a:xfrm>
+          <a:prstGeom prst="rect">
+            <a:avLst/>
+          </a:prstGeom>
+          <a:noFill/>
+          <a:ln/>
+        </p:spPr>
+        <p:txBody>
+          <a:bodyPr wrap="square" rtlCol="0" anchor="ctr"/>
+          <a:lstStyle/>
+          <a:p>
+            <a:pPr algn="ctr" indent="0" marL="0">
+              <a:buNone/>
+            </a:pPr>
+            <a:r>
+              <a:rPr lang="en-US" sz="700" dirty="0">
+                <a:solidFill>
+                  <a:srgbClr val="94A3B8"/>
+                </a:solidFill>
+                <a:latin typeface="Calibri" pitchFamily="34" charset="0"/>
+                <a:ea typeface="Calibri" pitchFamily="34" charset="-122"/>
+                <a:cs typeface="Calibri" pitchFamily="34" charset="-120"/>
+              </a:rPr>
+              <a:t>{{agency_name}}  •  Page 18</a:t>
+            </a:r>
+            <a:endParaRPr lang="en-US" sz="700" dirty="0"/>
+          </a:p>
+        </p:txBody>
+      </p:sp>
+    </p:spTree>
+  </p:cSld>
+  <p:clrMapOvr>
+    <a:masterClrMapping/>
+  </p:clrMapOvr>
+</p:sld>
+</file>
+
+<file path=ppt/slides/slide19.xml><?xml version="1.0" encoding="utf-8"?>
+<p:sld xmlns:a="http://schemas.openxmlformats.org/drawingml/2006/main" xmlns:r="http://schemas.openxmlformats.org/officeDocument/2006/relationships" xmlns:p="http://schemas.openxmlformats.org/presentationml/2006/main">
+  <p:cSld name="Slide 19">
+    <p:bg>
+      <p:bgPr>
+        <a:solidFill>
+          <a:srgbClr val="FFFFFF"/>
+        </a:solidFill>
+      </p:bgPr>
+    </p:bg>
+    <p:spTree>
+      <p:nvGrpSpPr>
+        <p:cNvPr id="1" name=""/>
+        <p:cNvGrpSpPr/>
+        <p:nvPr/>
+      </p:nvGrpSpPr>
+      <p:grpSpPr>
+        <a:xfrm>
+          <a:off x="0" y="0"/>
+          <a:ext cx="0" cy="0"/>
+          <a:chOff x="0" y="0"/>
+          <a:chExt cx="0" cy="0"/>
+        </a:xfrm>
+      </p:grpSpPr>
+      <p:sp>
+        <p:nvSpPr>
+          <p:cNvPr id="2" name="Text 0"/>
+          <p:cNvSpPr/>
+          <p:nvPr/>
+        </p:nvSpPr>
+        <p:spPr>
+          <a:xfrm>
+            <a:off x="1371600" y="548640"/>
+            <a:ext cx="9418320" cy="640080"/>
+          </a:xfrm>
+          <a:prstGeom prst="rect">
+            <a:avLst/>
+          </a:prstGeom>
+          <a:noFill/>
+          <a:ln/>
+        </p:spPr>
+        <p:txBody>
+          <a:bodyPr wrap="square" lIns="0" tIns="0" rIns="0" bIns="0" rtlCol="0" anchor="ctr"/>
+          <a:lstStyle/>
+          <a:p>
+            <a:pPr indent="0" marL="0">
+              <a:buNone/>
+            </a:pPr>
+            <a:r>
+              <a:rPr lang="en-US" sz="2600" dirty="0">
+                <a:solidFill>
+                  <a:srgbClr val="0F172A"/>
+                </a:solidFill>
+                <a:latin typeface="Georgia" pitchFamily="34" charset="0"/>
+                <a:ea typeface="Georgia" pitchFamily="34" charset="-122"/>
+                <a:cs typeface="Georgia" pitchFamily="34" charset="-120"/>
+              </a:rPr>
+              <a:t>{{custom_section_title}}</a:t>
+            </a:r>
+            <a:endParaRPr lang="en-US" sz="2600" dirty="0"/>
+          </a:p>
+        </p:txBody>
+      </p:sp>
+      <p:sp>
+        <p:nvSpPr>
+          <p:cNvPr id="3" name="Shape 1"/>
+          <p:cNvSpPr/>
+          <p:nvPr/>
+        </p:nvSpPr>
+        <p:spPr>
+          <a:xfrm>
+            <a:off x="1371600" y="1234440"/>
+            <a:ext cx="1828800" cy="13716"/>
+          </a:xfrm>
+          <a:prstGeom prst="rect">
+            <a:avLst/>
+          </a:prstGeom>
+          <a:solidFill>
+            <a:srgbClr val="0F172A"/>
+          </a:solidFill>
+          <a:ln/>
+        </p:spPr>
+      </p:sp>
+      <p:sp>
+        <p:nvSpPr>
+          <p:cNvPr id="4" name="Text 2"/>
+          <p:cNvSpPr/>
+          <p:nvPr/>
+        </p:nvSpPr>
+        <p:spPr>
+          <a:xfrm>
+            <a:off x="1371600" y="1554480"/>
+            <a:ext cx="9418320" cy="4572000"/>
+          </a:xfrm>
+          <a:prstGeom prst="rect">
+            <a:avLst/>
+          </a:prstGeom>
+          <a:noFill/>
+          <a:ln/>
+        </p:spPr>
+        <p:txBody>
+          <a:bodyPr wrap="square" rtlCol="0" anchor="t"/>
+          <a:lstStyle/>
+          <a:p>
+            <a:pPr indent="0" marL="0">
+              <a:lnSpc>
+                <a:spcPct val="140000"/>
+              </a:lnSpc>
+              <a:buNone/>
+            </a:pPr>
+            <a:r>
+              <a:rPr lang="en-US" sz="1300" dirty="0">
+                <a:solidFill>
+                  <a:srgbClr val="334155"/>
+                </a:solidFill>
+                <a:latin typeface="Calibri" pitchFamily="34" charset="0"/>
+                <a:ea typeface="Calibri" pitchFamily="34" charset="-122"/>
+                <a:cs typeface="Calibri" pitchFamily="34" charset="-120"/>
+              </a:rPr>
+              <a:t>{{custom_section_text}}</a:t>
+            </a:r>
+            <a:endParaRPr lang="en-US" sz="1300" dirty="0"/>
+          </a:p>
+        </p:txBody>
+      </p:sp>
+      <p:sp>
+        <p:nvSpPr>
+          <p:cNvPr id="5" name="Shape 3"/>
+          <p:cNvSpPr/>
+          <p:nvPr/>
+        </p:nvSpPr>
+        <p:spPr>
+          <a:xfrm>
+            <a:off x="1371600" y="6355080"/>
+            <a:ext cx="9418320" cy="4572"/>
+          </a:xfrm>
+          <a:prstGeom prst="rect">
+            <a:avLst/>
+          </a:prstGeom>
+          <a:solidFill>
+            <a:srgbClr val="E2E8F0"/>
+          </a:solidFill>
+          <a:ln/>
+        </p:spPr>
+      </p:sp>
+      <p:sp>
+        <p:nvSpPr>
+          <p:cNvPr id="6" name="Text 4"/>
+          <p:cNvSpPr/>
+          <p:nvPr/>
+        </p:nvSpPr>
+        <p:spPr>
+          <a:xfrm>
+            <a:off x="1371600" y="6446520"/>
+            <a:ext cx="9418320" cy="256032"/>
+          </a:xfrm>
+          <a:prstGeom prst="rect">
+            <a:avLst/>
+          </a:prstGeom>
+          <a:noFill/>
+          <a:ln/>
+        </p:spPr>
+        <p:txBody>
+          <a:bodyPr wrap="square" rtlCol="0" anchor="ctr"/>
+          <a:lstStyle/>
+          <a:p>
+            <a:pPr algn="ctr" indent="0" marL="0">
+              <a:buNone/>
+            </a:pPr>
+            <a:r>
+              <a:rPr lang="en-US" sz="700" dirty="0">
+                <a:solidFill>
+                  <a:srgbClr val="94A3B8"/>
+                </a:solidFill>
+                <a:latin typeface="Calibri" pitchFamily="34" charset="0"/>
+                <a:ea typeface="Calibri" pitchFamily="34" charset="-122"/>
+                <a:cs typeface="Calibri" pitchFamily="34" charset="-120"/>
+              </a:rPr>
+              <a:t>{{agency_name}}  •  Page 19</a:t>
+            </a:r>
+            <a:endParaRPr lang="en-US" sz="700" dirty="0"/>
+          </a:p>
+        </p:txBody>
+      </p:sp>
+    </p:spTree>
+  </p:cSld>
+  <p:clrMapOvr>
+    <a:masterClrMapping/>
+  </p:clrMapOvr>
+</p:sld>
+</file>
+
 <file path=ppt/slides/slide2.xml><?xml version="1.0" encoding="utf-8"?>
 <p:sld xmlns:a="http://schemas.openxmlformats.org/drawingml/2006/main" xmlns:r="http://schemas.openxmlformats.org/officeDocument/2006/relationships" xmlns:p="http://schemas.openxmlformats.org/presentationml/2006/main">
   <p:cSld name="Slide 2">
@@ -3340,7 +7067,7 @@
                 <a:ea typeface="Georgia" pitchFamily="34" charset="-122"/>
                 <a:cs typeface="Georgia" pitchFamily="34" charset="-120"/>
               </a:rPr>
-              <a:t>Paid Advertising</a:t>
+              <a:t>Website Engagement</a:t>
             </a:r>
             <a:endParaRPr lang="en-US" sz="2600" dirty="0"/>
           </a:p>
@@ -3399,7 +7126,7 @@
                 <a:ea typeface="Calibri" pitchFamily="34" charset="-122"/>
                 <a:cs typeface="Calibri" pitchFamily="34" charset="-120"/>
               </a:rPr>
-              <a:t>{{chart_spend}}</a:t>
+              <a:t>{{chart_device_breakdown}}</a:t>
             </a:r>
             <a:endParaRPr lang="en-US" sz="1000" dirty="0"/>
           </a:p>
@@ -3438,7 +7165,7 @@
                 <a:ea typeface="Calibri" pitchFamily="34" charset="-122"/>
                 <a:cs typeface="Calibri" pitchFamily="34" charset="-120"/>
               </a:rPr>
-              <a:t>{{chart_campaigns}}</a:t>
+              <a:t>{{chart_top_pages}}</a:t>
             </a:r>
             <a:endParaRPr lang="en-US" sz="1000" dirty="0"/>
           </a:p>
@@ -3480,7 +7207,7 @@
                 <a:ea typeface="Calibri" pitchFamily="34" charset="-122"/>
                 <a:cs typeface="Calibri" pitchFamily="34" charset="-120"/>
               </a:rPr>
-              <a:t>{{ads_narrative}}</a:t>
+              <a:t>{{website_narrative}}</a:t>
             </a:r>
             <a:endParaRPr lang="en-US" sz="1200" dirty="0"/>
           </a:p>
@@ -3604,13 +7331,13 @@
             <a:r>
               <a:rPr lang="en-US" sz="2600" dirty="0">
                 <a:solidFill>
-                  <a:srgbClr val="059669"/>
+                  <a:srgbClr val="0F172A"/>
                 </a:solidFill>
                 <a:latin typeface="Georgia" pitchFamily="34" charset="0"/>
                 <a:ea typeface="Georgia" pitchFamily="34" charset="-122"/>
                 <a:cs typeface="Georgia" pitchFamily="34" charset="-120"/>
               </a:rPr>
-              <a:t>Key Wins</a:t>
+              <a:t>Audience Insights</a:t>
             </a:r>
             <a:endParaRPr lang="en-US" sz="2600" dirty="0"/>
           </a:p>
@@ -3631,7 +7358,7 @@
             <a:avLst/>
           </a:prstGeom>
           <a:solidFill>
-            <a:srgbClr val="059669"/>
+            <a:srgbClr val="0F172A"/>
           </a:solidFill>
           <a:ln/>
         </p:spPr>
@@ -3644,8 +7371,86 @@
         </p:nvSpPr>
         <p:spPr>
           <a:xfrm>
-            <a:off x="1371600" y="1554480"/>
-            <a:ext cx="9418320" cy="4572000"/>
+            <a:off x="731520" y="1463040"/>
+            <a:ext cx="5120640" cy="2743200"/>
+          </a:xfrm>
+          <a:prstGeom prst="rect">
+            <a:avLst/>
+          </a:prstGeom>
+          <a:noFill/>
+          <a:ln/>
+        </p:spPr>
+        <p:txBody>
+          <a:bodyPr wrap="square" rtlCol="0" anchor="ctr"/>
+          <a:lstStyle/>
+          <a:p>
+            <a:pPr algn="ctr" indent="0" marL="0">
+              <a:buNone/>
+            </a:pPr>
+            <a:r>
+              <a:rPr lang="en-US" sz="1000" dirty="0">
+                <a:solidFill>
+                  <a:srgbClr val="94A3B8"/>
+                </a:solidFill>
+                <a:latin typeface="Calibri" pitchFamily="34" charset="0"/>
+                <a:ea typeface="Calibri" pitchFamily="34" charset="-122"/>
+                <a:cs typeface="Calibri" pitchFamily="34" charset="-120"/>
+              </a:rPr>
+              <a:t>{{chart_new_vs_returning}}</a:t>
+            </a:r>
+            <a:endParaRPr lang="en-US" sz="1000" dirty="0"/>
+          </a:p>
+        </p:txBody>
+      </p:sp>
+      <p:sp>
+        <p:nvSpPr>
+          <p:cNvPr id="5" name="Text 3"/>
+          <p:cNvSpPr/>
+          <p:nvPr/>
+        </p:nvSpPr>
+        <p:spPr>
+          <a:xfrm>
+            <a:off x="6217920" y="1463040"/>
+            <a:ext cx="5212080" cy="2743200"/>
+          </a:xfrm>
+          <a:prstGeom prst="rect">
+            <a:avLst/>
+          </a:prstGeom>
+          <a:noFill/>
+          <a:ln/>
+        </p:spPr>
+        <p:txBody>
+          <a:bodyPr wrap="square" rtlCol="0" anchor="ctr"/>
+          <a:lstStyle/>
+          <a:p>
+            <a:pPr algn="ctr" indent="0" marL="0">
+              <a:buNone/>
+            </a:pPr>
+            <a:r>
+              <a:rPr lang="en-US" sz="1000" dirty="0">
+                <a:solidFill>
+                  <a:srgbClr val="94A3B8"/>
+                </a:solidFill>
+                <a:latin typeface="Calibri" pitchFamily="34" charset="0"/>
+                <a:ea typeface="Calibri" pitchFamily="34" charset="-122"/>
+                <a:cs typeface="Calibri" pitchFamily="34" charset="-120"/>
+              </a:rPr>
+              <a:t>{{chart_top_countries}}</a:t>
+            </a:r>
+            <a:endParaRPr lang="en-US" sz="1000" dirty="0"/>
+          </a:p>
+        </p:txBody>
+      </p:sp>
+      <p:sp>
+        <p:nvSpPr>
+          <p:cNvPr id="6" name="Text 4"/>
+          <p:cNvSpPr/>
+          <p:nvPr/>
+        </p:nvSpPr>
+        <p:spPr>
+          <a:xfrm>
+            <a:off x="1371600" y="4480560"/>
+            <a:ext cx="9418320" cy="1737360"/>
           </a:xfrm>
           <a:prstGeom prst="rect">
             <a:avLst/>
@@ -3659,12 +7464,12 @@
           <a:p>
             <a:pPr indent="0" marL="0">
               <a:lnSpc>
-                <a:spcPct val="150000"/>
+                <a:spcPct val="140000"/>
               </a:lnSpc>
               <a:buNone/>
             </a:pPr>
             <a:r>
-              <a:rPr lang="en-US" sz="1300" dirty="0">
+              <a:rPr lang="en-US" sz="1200" dirty="0">
                 <a:solidFill>
                   <a:srgbClr val="334155"/>
                 </a:solidFill>
@@ -3672,15 +7477,15 @@
                 <a:ea typeface="Calibri" pitchFamily="34" charset="-122"/>
                 <a:cs typeface="Calibri" pitchFamily="34" charset="-120"/>
               </a:rPr>
-              <a:t>{{key_wins}}</a:t>
-            </a:r>
-            <a:endParaRPr lang="en-US" sz="1300" dirty="0"/>
-          </a:p>
-        </p:txBody>
-      </p:sp>
-      <p:sp>
-        <p:nvSpPr>
-          <p:cNvPr id="5" name="Shape 3"/>
+              <a:t>{{website_narrative}}</a:t>
+            </a:r>
+            <a:endParaRPr lang="en-US" sz="1200" dirty="0"/>
+          </a:p>
+        </p:txBody>
+      </p:sp>
+      <p:sp>
+        <p:nvSpPr>
+          <p:cNvPr id="7" name="Shape 5"/>
           <p:cNvSpPr/>
           <p:nvPr/>
         </p:nvSpPr>
@@ -3700,7 +7505,7 @@
       </p:sp>
       <p:sp>
         <p:nvSpPr>
-          <p:cNvPr id="6" name="Text 4"/>
+          <p:cNvPr id="8" name="Text 6"/>
           <p:cNvSpPr/>
           <p:nvPr/>
         </p:nvSpPr>
@@ -3796,13 +7601,13 @@
             <a:r>
               <a:rPr lang="en-US" sz="2600" dirty="0">
                 <a:solidFill>
-                  <a:srgbClr val="D97706"/>
+                  <a:srgbClr val="0F172A"/>
                 </a:solidFill>
                 <a:latin typeface="Georgia" pitchFamily="34" charset="0"/>
                 <a:ea typeface="Georgia" pitchFamily="34" charset="-122"/>
                 <a:cs typeface="Georgia" pitchFamily="34" charset="-120"/>
               </a:rPr>
-              <a:t>Concerns &amp; Recommendations</a:t>
+              <a:t>Bounce Rate Analysis</a:t>
             </a:r>
             <a:endParaRPr lang="en-US" sz="2600" dirty="0"/>
           </a:p>
@@ -3823,7 +7628,7 @@
             <a:avLst/>
           </a:prstGeom>
           <a:solidFill>
-            <a:srgbClr val="D97706"/>
+            <a:srgbClr val="0F172A"/>
           </a:solidFill>
           <a:ln/>
         </p:spPr>
@@ -3836,8 +7641,47 @@
         </p:nvSpPr>
         <p:spPr>
           <a:xfrm>
-            <a:off x="1371600" y="1554480"/>
-            <a:ext cx="9418320" cy="4572000"/>
+            <a:off x="1371600" y="1463040"/>
+            <a:ext cx="9418320" cy="3657600"/>
+          </a:xfrm>
+          <a:prstGeom prst="rect">
+            <a:avLst/>
+          </a:prstGeom>
+          <a:noFill/>
+          <a:ln/>
+        </p:spPr>
+        <p:txBody>
+          <a:bodyPr wrap="square" rtlCol="0" anchor="ctr"/>
+          <a:lstStyle/>
+          <a:p>
+            <a:pPr algn="ctr" indent="0" marL="0">
+              <a:buNone/>
+            </a:pPr>
+            <a:r>
+              <a:rPr lang="en-US" sz="1000" dirty="0">
+                <a:solidFill>
+                  <a:srgbClr val="94A3B8"/>
+                </a:solidFill>
+                <a:latin typeface="Calibri" pitchFamily="34" charset="0"/>
+                <a:ea typeface="Calibri" pitchFamily="34" charset="-122"/>
+                <a:cs typeface="Calibri" pitchFamily="34" charset="-120"/>
+              </a:rPr>
+              <a:t>{{chart_bounce_rate}}</a:t>
+            </a:r>
+            <a:endParaRPr lang="en-US" sz="1000" dirty="0"/>
+          </a:p>
+        </p:txBody>
+      </p:sp>
+      <p:sp>
+        <p:nvSpPr>
+          <p:cNvPr id="5" name="Text 3"/>
+          <p:cNvSpPr/>
+          <p:nvPr/>
+        </p:nvSpPr>
+        <p:spPr>
+          <a:xfrm>
+            <a:off x="1371600" y="5394960"/>
+            <a:ext cx="9418320" cy="1097280"/>
           </a:xfrm>
           <a:prstGeom prst="rect">
             <a:avLst/>
@@ -3851,12 +7695,12 @@
           <a:p>
             <a:pPr indent="0" marL="0">
               <a:lnSpc>
-                <a:spcPct val="150000"/>
+                <a:spcPct val="140000"/>
               </a:lnSpc>
               <a:buNone/>
             </a:pPr>
             <a:r>
-              <a:rPr lang="en-US" sz="1300" dirty="0">
+              <a:rPr lang="en-US" sz="1200" dirty="0">
                 <a:solidFill>
                   <a:srgbClr val="334155"/>
                 </a:solidFill>
@@ -3864,15 +7708,15 @@
                 <a:ea typeface="Calibri" pitchFamily="34" charset="-122"/>
                 <a:cs typeface="Calibri" pitchFamily="34" charset="-120"/>
               </a:rPr>
-              <a:t>{{concerns}}</a:t>
-            </a:r>
-            <a:endParaRPr lang="en-US" sz="1300" dirty="0"/>
-          </a:p>
-        </p:txBody>
-      </p:sp>
-      <p:sp>
-        <p:nvSpPr>
-          <p:cNvPr id="5" name="Shape 3"/>
+              <a:t>{{website_narrative}}</a:t>
+            </a:r>
+            <a:endParaRPr lang="en-US" sz="1200" dirty="0"/>
+          </a:p>
+        </p:txBody>
+      </p:sp>
+      <p:sp>
+        <p:nvSpPr>
+          <p:cNvPr id="6" name="Shape 4"/>
           <p:cNvSpPr/>
           <p:nvPr/>
         </p:nvSpPr>
@@ -3892,7 +7736,7 @@
       </p:sp>
       <p:sp>
         <p:nvSpPr>
-          <p:cNvPr id="6" name="Text 4"/>
+          <p:cNvPr id="7" name="Text 5"/>
           <p:cNvSpPr/>
           <p:nvPr/>
         </p:nvSpPr>
@@ -3994,7 +7838,7 @@
                 <a:ea typeface="Georgia" pitchFamily="34" charset="-122"/>
                 <a:cs typeface="Georgia" pitchFamily="34" charset="-120"/>
               </a:rPr>
-              <a:t>Next Steps</a:t>
+              <a:t>Paid Advertising — Meta Ads</a:t>
             </a:r>
             <a:endParaRPr lang="en-US" sz="2600" dirty="0"/>
           </a:p>
@@ -4028,8 +7872,86 @@
         </p:nvSpPr>
         <p:spPr>
           <a:xfrm>
-            <a:off x="1371600" y="1554480"/>
-            <a:ext cx="9418320" cy="3657600"/>
+            <a:off x="731520" y="1463040"/>
+            <a:ext cx="5120640" cy="2743200"/>
+          </a:xfrm>
+          <a:prstGeom prst="rect">
+            <a:avLst/>
+          </a:prstGeom>
+          <a:noFill/>
+          <a:ln/>
+        </p:spPr>
+        <p:txBody>
+          <a:bodyPr wrap="square" rtlCol="0" anchor="ctr"/>
+          <a:lstStyle/>
+          <a:p>
+            <a:pPr algn="ctr" indent="0" marL="0">
+              <a:buNone/>
+            </a:pPr>
+            <a:r>
+              <a:rPr lang="en-US" sz="1000" dirty="0">
+                <a:solidFill>
+                  <a:srgbClr val="94A3B8"/>
+                </a:solidFill>
+                <a:latin typeface="Calibri" pitchFamily="34" charset="0"/>
+                <a:ea typeface="Calibri" pitchFamily="34" charset="-122"/>
+                <a:cs typeface="Calibri" pitchFamily="34" charset="-120"/>
+              </a:rPr>
+              <a:t>{{chart_spend}}</a:t>
+            </a:r>
+            <a:endParaRPr lang="en-US" sz="1000" dirty="0"/>
+          </a:p>
+        </p:txBody>
+      </p:sp>
+      <p:sp>
+        <p:nvSpPr>
+          <p:cNvPr id="5" name="Text 3"/>
+          <p:cNvSpPr/>
+          <p:nvPr/>
+        </p:nvSpPr>
+        <p:spPr>
+          <a:xfrm>
+            <a:off x="6217920" y="1463040"/>
+            <a:ext cx="5212080" cy="2743200"/>
+          </a:xfrm>
+          <a:prstGeom prst="rect">
+            <a:avLst/>
+          </a:prstGeom>
+          <a:noFill/>
+          <a:ln/>
+        </p:spPr>
+        <p:txBody>
+          <a:bodyPr wrap="square" rtlCol="0" anchor="ctr"/>
+          <a:lstStyle/>
+          <a:p>
+            <a:pPr algn="ctr" indent="0" marL="0">
+              <a:buNone/>
+            </a:pPr>
+            <a:r>
+              <a:rPr lang="en-US" sz="1000" dirty="0">
+                <a:solidFill>
+                  <a:srgbClr val="94A3B8"/>
+                </a:solidFill>
+                <a:latin typeface="Calibri" pitchFamily="34" charset="0"/>
+                <a:ea typeface="Calibri" pitchFamily="34" charset="-122"/>
+                <a:cs typeface="Calibri" pitchFamily="34" charset="-120"/>
+              </a:rPr>
+              <a:t>{{chart_campaigns}}</a:t>
+            </a:r>
+            <a:endParaRPr lang="en-US" sz="1000" dirty="0"/>
+          </a:p>
+        </p:txBody>
+      </p:sp>
+      <p:sp>
+        <p:nvSpPr>
+          <p:cNvPr id="6" name="Text 4"/>
+          <p:cNvSpPr/>
+          <p:nvPr/>
+        </p:nvSpPr>
+        <p:spPr>
+          <a:xfrm>
+            <a:off x="1371600" y="4480560"/>
+            <a:ext cx="9418320" cy="1737360"/>
           </a:xfrm>
           <a:prstGeom prst="rect">
             <a:avLst/>
@@ -4043,12 +7965,12 @@
           <a:p>
             <a:pPr indent="0" marL="0">
               <a:lnSpc>
-                <a:spcPct val="150000"/>
+                <a:spcPct val="140000"/>
               </a:lnSpc>
               <a:buNone/>
             </a:pPr>
             <a:r>
-              <a:rPr lang="en-US" sz="1300" dirty="0">
+              <a:rPr lang="en-US" sz="1200" dirty="0">
                 <a:solidFill>
                   <a:srgbClr val="334155"/>
                 </a:solidFill>
@@ -4056,68 +7978,9 @@
                 <a:ea typeface="Calibri" pitchFamily="34" charset="-122"/>
                 <a:cs typeface="Calibri" pitchFamily="34" charset="-120"/>
               </a:rPr>
-              <a:t>{{next_steps}}</a:t>
-            </a:r>
-            <a:endParaRPr lang="en-US" sz="1300" dirty="0"/>
-          </a:p>
-        </p:txBody>
-      </p:sp>
-      <p:sp>
-        <p:nvSpPr>
-          <p:cNvPr id="5" name="Shape 3"/>
-          <p:cNvSpPr/>
-          <p:nvPr/>
-        </p:nvSpPr>
-        <p:spPr>
-          <a:xfrm>
-            <a:off x="1371600" y="5669280"/>
-            <a:ext cx="9418320" cy="9144"/>
-          </a:xfrm>
-          <a:prstGeom prst="rect">
-            <a:avLst/>
-          </a:prstGeom>
-          <a:solidFill>
-            <a:srgbClr val="0F172A"/>
-          </a:solidFill>
-          <a:ln/>
-        </p:spPr>
-      </p:sp>
-      <p:sp>
-        <p:nvSpPr>
-          <p:cNvPr id="6" name="Text 4"/>
-          <p:cNvSpPr/>
-          <p:nvPr/>
-        </p:nvSpPr>
-        <p:spPr>
-          <a:xfrm>
-            <a:off x="1371600" y="5852160"/>
-            <a:ext cx="9418320" cy="320040"/>
-          </a:xfrm>
-          <a:prstGeom prst="rect">
-            <a:avLst/>
-          </a:prstGeom>
-          <a:noFill/>
-          <a:ln/>
-        </p:spPr>
-        <p:txBody>
-          <a:bodyPr wrap="square" rtlCol="0" anchor="ctr"/>
-          <a:lstStyle/>
-          <a:p>
-            <a:pPr algn="ctr" indent="0" marL="0">
-              <a:buNone/>
-            </a:pPr>
-            <a:r>
-              <a:rPr lang="en-US" sz="1100" dirty="0">
-                <a:solidFill>
-                  <a:srgbClr val="64748B"/>
-                </a:solidFill>
-                <a:latin typeface="Calibri" pitchFamily="34" charset="0"/>
-                <a:ea typeface="Calibri" pitchFamily="34" charset="-122"/>
-                <a:cs typeface="Calibri" pitchFamily="34" charset="-120"/>
-              </a:rPr>
-              <a:t>Questions? {{agency_name}}  •  {{agency_email}}</a:t>
-            </a:r>
-            <a:endParaRPr lang="en-US" sz="1100" dirty="0"/>
+              <a:t>{{ads_narrative}}</a:t>
+            </a:r>
+            <a:endParaRPr lang="en-US" sz="1200" dirty="0"/>
           </a:p>
         </p:txBody>
       </p:sp>
@@ -4245,7 +8108,7 @@
                 <a:ea typeface="Georgia" pitchFamily="34" charset="-122"/>
                 <a:cs typeface="Georgia" pitchFamily="34" charset="-120"/>
               </a:rPr>
-              <a:t>{{custom_section_title}}</a:t>
+              <a:t>Meta Ads — Audience</a:t>
             </a:r>
             <a:endParaRPr lang="en-US" sz="2600" dirty="0"/>
           </a:p>
@@ -4279,8 +8142,86 @@
         </p:nvSpPr>
         <p:spPr>
           <a:xfrm>
-            <a:off x="1371600" y="1554480"/>
-            <a:ext cx="9418320" cy="4572000"/>
+            <a:off x="731520" y="1463040"/>
+            <a:ext cx="5120640" cy="2743200"/>
+          </a:xfrm>
+          <a:prstGeom prst="rect">
+            <a:avLst/>
+          </a:prstGeom>
+          <a:noFill/>
+          <a:ln/>
+        </p:spPr>
+        <p:txBody>
+          <a:bodyPr wrap="square" rtlCol="0" anchor="ctr"/>
+          <a:lstStyle/>
+          <a:p>
+            <a:pPr algn="ctr" indent="0" marL="0">
+              <a:buNone/>
+            </a:pPr>
+            <a:r>
+              <a:rPr lang="en-US" sz="1000" dirty="0">
+                <a:solidFill>
+                  <a:srgbClr val="94A3B8"/>
+                </a:solidFill>
+                <a:latin typeface="Calibri" pitchFamily="34" charset="0"/>
+                <a:ea typeface="Calibri" pitchFamily="34" charset="-122"/>
+                <a:cs typeface="Calibri" pitchFamily="34" charset="-120"/>
+              </a:rPr>
+              <a:t>{{chart_demographics}}</a:t>
+            </a:r>
+            <a:endParaRPr lang="en-US" sz="1000" dirty="0"/>
+          </a:p>
+        </p:txBody>
+      </p:sp>
+      <p:sp>
+        <p:nvSpPr>
+          <p:cNvPr id="5" name="Text 3"/>
+          <p:cNvSpPr/>
+          <p:nvPr/>
+        </p:nvSpPr>
+        <p:spPr>
+          <a:xfrm>
+            <a:off x="6217920" y="1463040"/>
+            <a:ext cx="5212080" cy="2743200"/>
+          </a:xfrm>
+          <a:prstGeom prst="rect">
+            <a:avLst/>
+          </a:prstGeom>
+          <a:noFill/>
+          <a:ln/>
+        </p:spPr>
+        <p:txBody>
+          <a:bodyPr wrap="square" rtlCol="0" anchor="ctr"/>
+          <a:lstStyle/>
+          <a:p>
+            <a:pPr algn="ctr" indent="0" marL="0">
+              <a:buNone/>
+            </a:pPr>
+            <a:r>
+              <a:rPr lang="en-US" sz="1000" dirty="0">
+                <a:solidFill>
+                  <a:srgbClr val="94A3B8"/>
+                </a:solidFill>
+                <a:latin typeface="Calibri" pitchFamily="34" charset="0"/>
+                <a:ea typeface="Calibri" pitchFamily="34" charset="-122"/>
+                <a:cs typeface="Calibri" pitchFamily="34" charset="-120"/>
+              </a:rPr>
+              <a:t>{{chart_placements}}</a:t>
+            </a:r>
+            <a:endParaRPr lang="en-US" sz="1000" dirty="0"/>
+          </a:p>
+        </p:txBody>
+      </p:sp>
+      <p:sp>
+        <p:nvSpPr>
+          <p:cNvPr id="6" name="Text 4"/>
+          <p:cNvSpPr/>
+          <p:nvPr/>
+        </p:nvSpPr>
+        <p:spPr>
+          <a:xfrm>
+            <a:off x="1371600" y="4480560"/>
+            <a:ext cx="9418320" cy="1737360"/>
           </a:xfrm>
           <a:prstGeom prst="rect">
             <a:avLst/>
@@ -4299,7 +8240,7 @@
               <a:buNone/>
             </a:pPr>
             <a:r>
-              <a:rPr lang="en-US" sz="1300" dirty="0">
+              <a:rPr lang="en-US" sz="1200" dirty="0">
                 <a:solidFill>
                   <a:srgbClr val="334155"/>
                 </a:solidFill>
@@ -4307,15 +8248,15 @@
                 <a:ea typeface="Calibri" pitchFamily="34" charset="-122"/>
                 <a:cs typeface="Calibri" pitchFamily="34" charset="-120"/>
               </a:rPr>
-              <a:t>{{custom_section_text}}</a:t>
-            </a:r>
-            <a:endParaRPr lang="en-US" sz="1300" dirty="0"/>
-          </a:p>
-        </p:txBody>
-      </p:sp>
-      <p:sp>
-        <p:nvSpPr>
-          <p:cNvPr id="5" name="Shape 3"/>
+              <a:t>{{ads_narrative}}</a:t>
+            </a:r>
+            <a:endParaRPr lang="en-US" sz="1200" dirty="0"/>
+          </a:p>
+        </p:txBody>
+      </p:sp>
+      <p:sp>
+        <p:nvSpPr>
+          <p:cNvPr id="7" name="Shape 5"/>
           <p:cNvSpPr/>
           <p:nvPr/>
         </p:nvSpPr>
@@ -4335,7 +8276,7 @@
       </p:sp>
       <p:sp>
         <p:nvSpPr>
-          <p:cNvPr id="6" name="Text 4"/>
+          <p:cNvPr id="8" name="Text 6"/>
           <p:cNvSpPr/>
           <p:nvPr/>
         </p:nvSpPr>

--- a/backend/templates/pptx/minimal_elegant.pptx
+++ b/backend/templates/pptx/minimal_elegant.pptx
@@ -2574,6 +2574,10 @@
           </a:solidFill>
           <a:ln/>
         </p:spPr>
+        <p:txBody>
+          <a:bodyPr/>
+          <a:p/>
+        </p:txBody>
       </p:sp>
       <p:sp>
         <p:nvSpPr>
@@ -2821,6 +2825,10 @@
           </a:solidFill>
           <a:ln/>
         </p:spPr>
+        <p:txBody>
+          <a:bodyPr/>
+          <a:p/>
+        </p:txBody>
       </p:sp>
       <p:sp>
         <p:nvSpPr>
@@ -2922,6 +2930,10 @@
           </a:solidFill>
           <a:ln/>
         </p:spPr>
+        <p:txBody>
+          <a:bodyPr/>
+          <a:p/>
+        </p:txBody>
       </p:sp>
       <p:sp>
         <p:nvSpPr>
@@ -3052,6 +3064,10 @@
           </a:solidFill>
           <a:ln/>
         </p:spPr>
+        <p:txBody>
+          <a:bodyPr/>
+          <a:p/>
+        </p:txBody>
       </p:sp>
       <p:sp>
         <p:nvSpPr>
@@ -3192,6 +3208,10 @@
           </a:solidFill>
           <a:ln/>
         </p:spPr>
+        <p:txBody>
+          <a:bodyPr/>
+          <a:p/>
+        </p:txBody>
       </p:sp>
       <p:sp>
         <p:nvSpPr>
@@ -3322,6 +3342,10 @@
           </a:solidFill>
           <a:ln/>
         </p:spPr>
+        <p:txBody>
+          <a:bodyPr/>
+          <a:p/>
+        </p:txBody>
       </p:sp>
       <p:sp>
         <p:nvSpPr>
@@ -3423,6 +3447,10 @@
           </a:solidFill>
           <a:ln/>
         </p:spPr>
+        <p:txBody>
+          <a:bodyPr/>
+          <a:p/>
+        </p:txBody>
       </p:sp>
       <p:sp>
         <p:nvSpPr>
@@ -3553,6 +3581,10 @@
           </a:solidFill>
           <a:ln/>
         </p:spPr>
+        <p:txBody>
+          <a:bodyPr/>
+          <a:p/>
+        </p:txBody>
       </p:sp>
       <p:sp>
         <p:nvSpPr>
@@ -3693,6 +3725,10 @@
           </a:solidFill>
           <a:ln/>
         </p:spPr>
+        <p:txBody>
+          <a:bodyPr/>
+          <a:p/>
+        </p:txBody>
       </p:sp>
       <p:sp>
         <p:nvSpPr>
@@ -3823,6 +3859,10 @@
           </a:solidFill>
           <a:ln/>
         </p:spPr>
+        <p:txBody>
+          <a:bodyPr/>
+          <a:p/>
+        </p:txBody>
       </p:sp>
       <p:sp>
         <p:nvSpPr>
@@ -3921,6 +3961,10 @@
           </a:solidFill>
           <a:ln/>
         </p:spPr>
+        <p:txBody>
+          <a:bodyPr/>
+          <a:p/>
+        </p:txBody>
       </p:sp>
       <p:sp>
         <p:nvSpPr>
@@ -4019,6 +4063,10 @@
           </a:solidFill>
           <a:ln/>
         </p:spPr>
+        <p:txBody>
+          <a:bodyPr/>
+          <a:p/>
+        </p:txBody>
       </p:sp>
       <p:sp>
         <p:nvSpPr>
@@ -4117,6 +4165,10 @@
           </a:solidFill>
           <a:ln/>
         </p:spPr>
+        <p:txBody>
+          <a:bodyPr/>
+          <a:p/>
+        </p:txBody>
       </p:sp>
       <p:sp>
         <p:nvSpPr>
@@ -4215,6 +4267,10 @@
           </a:solidFill>
           <a:ln/>
         </p:spPr>
+        <p:txBody>
+          <a:bodyPr/>
+          <a:p/>
+        </p:txBody>
       </p:sp>
       <p:sp>
         <p:nvSpPr>
@@ -4313,6 +4369,10 @@
           </a:solidFill>
           <a:ln/>
         </p:spPr>
+        <p:txBody>
+          <a:bodyPr/>
+          <a:p/>
+        </p:txBody>
       </p:sp>
       <p:sp>
         <p:nvSpPr>
@@ -4411,6 +4471,10 @@
           </a:solidFill>
           <a:ln/>
         </p:spPr>
+        <p:txBody>
+          <a:bodyPr/>
+          <a:p/>
+        </p:txBody>
       </p:sp>
       <p:sp>
         <p:nvSpPr>
@@ -4420,8 +4484,8 @@
         </p:nvSpPr>
         <p:spPr>
           <a:xfrm>
-            <a:off x="1371600" y="3337560"/>
-            <a:ext cx="9418320" cy="2606040"/>
+            <a:off x="1371600" y="3328416"/>
+            <a:ext cx="9418320" cy="2980944"/>
           </a:xfrm>
           <a:prstGeom prst="rect">
             <a:avLst/>
@@ -4470,6 +4534,10 @@
           </a:solidFill>
           <a:ln/>
         </p:spPr>
+        <p:txBody>
+          <a:bodyPr/>
+          <a:p/>
+        </p:txBody>
       </p:sp>
       <p:sp>
         <p:nvSpPr>
@@ -5658,6 +5726,10 @@
           </a:solidFill>
           <a:ln/>
         </p:spPr>
+        <p:txBody>
+          <a:bodyPr/>
+          <a:p/>
+        </p:txBody>
       </p:sp>
       <p:sp>
         <p:nvSpPr>
@@ -5720,6 +5792,10 @@
           </a:solidFill>
           <a:ln/>
         </p:spPr>
+        <p:txBody>
+          <a:bodyPr/>
+          <a:p/>
+        </p:txBody>
       </p:sp>
       <p:sp>
         <p:nvSpPr>
@@ -5850,6 +5926,10 @@
           </a:solidFill>
           <a:ln/>
         </p:spPr>
+        <p:txBody>
+          <a:bodyPr/>
+          <a:p/>
+        </p:txBody>
       </p:sp>
       <p:sp>
         <p:nvSpPr>
@@ -5987,6 +6067,10 @@
           </a:solidFill>
           <a:ln/>
         </p:spPr>
+        <p:txBody>
+          <a:bodyPr/>
+          <a:p/>
+        </p:txBody>
       </p:sp>
       <p:sp>
         <p:nvSpPr>
@@ -6124,6 +6208,10 @@
           </a:solidFill>
           <a:ln/>
         </p:spPr>
+        <p:txBody>
+          <a:bodyPr/>
+          <a:p/>
+        </p:txBody>
       </p:sp>
       <p:sp>
         <p:nvSpPr>
@@ -6261,6 +6349,10 @@
           </a:solidFill>
           <a:ln/>
         </p:spPr>
+        <p:txBody>
+          <a:bodyPr/>
+          <a:p/>
+        </p:txBody>
       </p:sp>
       <p:sp>
         <p:nvSpPr>
@@ -6398,6 +6490,10 @@
           </a:solidFill>
           <a:ln/>
         </p:spPr>
+        <p:txBody>
+          <a:bodyPr/>
+          <a:p/>
+        </p:txBody>
       </p:sp>
       <p:sp>
         <p:nvSpPr>
@@ -6535,6 +6631,10 @@
           </a:solidFill>
           <a:ln/>
         </p:spPr>
+        <p:txBody>
+          <a:bodyPr/>
+          <a:p/>
+        </p:txBody>
       </p:sp>
       <p:sp>
         <p:nvSpPr>
@@ -6672,6 +6772,10 @@
           </a:solidFill>
           <a:ln/>
         </p:spPr>
+        <p:txBody>
+          <a:bodyPr/>
+          <a:p/>
+        </p:txBody>
       </p:sp>
       <p:sp>
         <p:nvSpPr>
@@ -6692,6 +6796,10 @@
           </a:solidFill>
           <a:ln/>
         </p:spPr>
+        <p:txBody>
+          <a:bodyPr/>
+          <a:p/>
+        </p:txBody>
       </p:sp>
       <p:sp>
         <p:nvSpPr>
@@ -6822,6 +6930,10 @@
           </a:solidFill>
           <a:ln/>
         </p:spPr>
+        <p:txBody>
+          <a:bodyPr/>
+          <a:p/>
+        </p:txBody>
       </p:sp>
       <p:sp>
         <p:nvSpPr>
@@ -6962,6 +7074,10 @@
           </a:solidFill>
           <a:ln/>
         </p:spPr>
+        <p:txBody>
+          <a:bodyPr/>
+          <a:p/>
+        </p:txBody>
       </p:sp>
       <p:sp>
         <p:nvSpPr>
@@ -7092,6 +7208,10 @@
           </a:solidFill>
           <a:ln/>
         </p:spPr>
+        <p:txBody>
+          <a:bodyPr/>
+          <a:p/>
+        </p:txBody>
       </p:sp>
       <p:sp>
         <p:nvSpPr>
@@ -7232,6 +7352,10 @@
           </a:solidFill>
           <a:ln/>
         </p:spPr>
+        <p:txBody>
+          <a:bodyPr/>
+          <a:p/>
+        </p:txBody>
       </p:sp>
       <p:sp>
         <p:nvSpPr>
@@ -7362,6 +7486,10 @@
           </a:solidFill>
           <a:ln/>
         </p:spPr>
+        <p:txBody>
+          <a:bodyPr/>
+          <a:p/>
+        </p:txBody>
       </p:sp>
       <p:sp>
         <p:nvSpPr>
@@ -7502,6 +7630,10 @@
           </a:solidFill>
           <a:ln/>
         </p:spPr>
+        <p:txBody>
+          <a:bodyPr/>
+          <a:p/>
+        </p:txBody>
       </p:sp>
       <p:sp>
         <p:nvSpPr>
@@ -7632,6 +7764,10 @@
           </a:solidFill>
           <a:ln/>
         </p:spPr>
+        <p:txBody>
+          <a:bodyPr/>
+          <a:p/>
+        </p:txBody>
       </p:sp>
       <p:sp>
         <p:nvSpPr>
@@ -7733,6 +7869,10 @@
           </a:solidFill>
           <a:ln/>
         </p:spPr>
+        <p:txBody>
+          <a:bodyPr/>
+          <a:p/>
+        </p:txBody>
       </p:sp>
       <p:sp>
         <p:nvSpPr>
@@ -7863,6 +8003,10 @@
           </a:solidFill>
           <a:ln/>
         </p:spPr>
+        <p:txBody>
+          <a:bodyPr/>
+          <a:p/>
+        </p:txBody>
       </p:sp>
       <p:sp>
         <p:nvSpPr>
@@ -8003,6 +8147,10 @@
           </a:solidFill>
           <a:ln/>
         </p:spPr>
+        <p:txBody>
+          <a:bodyPr/>
+          <a:p/>
+        </p:txBody>
       </p:sp>
       <p:sp>
         <p:nvSpPr>
@@ -8133,6 +8281,10 @@
           </a:solidFill>
           <a:ln/>
         </p:spPr>
+        <p:txBody>
+          <a:bodyPr/>
+          <a:p/>
+        </p:txBody>
       </p:sp>
       <p:sp>
         <p:nvSpPr>
@@ -8273,6 +8425,10 @@
           </a:solidFill>
           <a:ln/>
         </p:spPr>
+        <p:txBody>
+          <a:bodyPr/>
+          <a:p/>
+        </p:txBody>
       </p:sp>
       <p:sp>
         <p:nvSpPr>

--- a/backend/templates/pptx/minimal_elegant.pptx
+++ b/backend/templates/pptx/minimal_elegant.pptx
@@ -2574,10 +2574,6 @@
           </a:solidFill>
           <a:ln/>
         </p:spPr>
-        <p:txBody>
-          <a:bodyPr/>
-          <a:p/>
-        </p:txBody>
       </p:sp>
       <p:sp>
         <p:nvSpPr>
@@ -2825,10 +2821,6 @@
           </a:solidFill>
           <a:ln/>
         </p:spPr>
-        <p:txBody>
-          <a:bodyPr/>
-          <a:p/>
-        </p:txBody>
       </p:sp>
       <p:sp>
         <p:nvSpPr>
@@ -2930,10 +2922,6 @@
           </a:solidFill>
           <a:ln/>
         </p:spPr>
-        <p:txBody>
-          <a:bodyPr/>
-          <a:p/>
-        </p:txBody>
       </p:sp>
       <p:sp>
         <p:nvSpPr>
@@ -3064,10 +3052,6 @@
           </a:solidFill>
           <a:ln/>
         </p:spPr>
-        <p:txBody>
-          <a:bodyPr/>
-          <a:p/>
-        </p:txBody>
       </p:sp>
       <p:sp>
         <p:nvSpPr>
@@ -3208,10 +3192,6 @@
           </a:solidFill>
           <a:ln/>
         </p:spPr>
-        <p:txBody>
-          <a:bodyPr/>
-          <a:p/>
-        </p:txBody>
       </p:sp>
       <p:sp>
         <p:nvSpPr>
@@ -3342,10 +3322,6 @@
           </a:solidFill>
           <a:ln/>
         </p:spPr>
-        <p:txBody>
-          <a:bodyPr/>
-          <a:p/>
-        </p:txBody>
       </p:sp>
       <p:sp>
         <p:nvSpPr>
@@ -3447,10 +3423,6 @@
           </a:solidFill>
           <a:ln/>
         </p:spPr>
-        <p:txBody>
-          <a:bodyPr/>
-          <a:p/>
-        </p:txBody>
       </p:sp>
       <p:sp>
         <p:nvSpPr>
@@ -3581,10 +3553,6 @@
           </a:solidFill>
           <a:ln/>
         </p:spPr>
-        <p:txBody>
-          <a:bodyPr/>
-          <a:p/>
-        </p:txBody>
       </p:sp>
       <p:sp>
         <p:nvSpPr>
@@ -3725,10 +3693,6 @@
           </a:solidFill>
           <a:ln/>
         </p:spPr>
-        <p:txBody>
-          <a:bodyPr/>
-          <a:p/>
-        </p:txBody>
       </p:sp>
       <p:sp>
         <p:nvSpPr>
@@ -3859,10 +3823,6 @@
           </a:solidFill>
           <a:ln/>
         </p:spPr>
-        <p:txBody>
-          <a:bodyPr/>
-          <a:p/>
-        </p:txBody>
       </p:sp>
       <p:sp>
         <p:nvSpPr>
@@ -3961,10 +3921,6 @@
           </a:solidFill>
           <a:ln/>
         </p:spPr>
-        <p:txBody>
-          <a:bodyPr/>
-          <a:p/>
-        </p:txBody>
       </p:sp>
       <p:sp>
         <p:nvSpPr>
@@ -4063,10 +4019,6 @@
           </a:solidFill>
           <a:ln/>
         </p:spPr>
-        <p:txBody>
-          <a:bodyPr/>
-          <a:p/>
-        </p:txBody>
       </p:sp>
       <p:sp>
         <p:nvSpPr>
@@ -4165,10 +4117,6 @@
           </a:solidFill>
           <a:ln/>
         </p:spPr>
-        <p:txBody>
-          <a:bodyPr/>
-          <a:p/>
-        </p:txBody>
       </p:sp>
       <p:sp>
         <p:nvSpPr>
@@ -4267,10 +4215,6 @@
           </a:solidFill>
           <a:ln/>
         </p:spPr>
-        <p:txBody>
-          <a:bodyPr/>
-          <a:p/>
-        </p:txBody>
       </p:sp>
       <p:sp>
         <p:nvSpPr>
@@ -4369,10 +4313,6 @@
           </a:solidFill>
           <a:ln/>
         </p:spPr>
-        <p:txBody>
-          <a:bodyPr/>
-          <a:p/>
-        </p:txBody>
       </p:sp>
       <p:sp>
         <p:nvSpPr>
@@ -4471,10 +4411,6 @@
           </a:solidFill>
           <a:ln/>
         </p:spPr>
-        <p:txBody>
-          <a:bodyPr/>
-          <a:p/>
-        </p:txBody>
       </p:sp>
       <p:sp>
         <p:nvSpPr>
@@ -4484,8 +4420,8 @@
         </p:nvSpPr>
         <p:spPr>
           <a:xfrm>
-            <a:off x="1371600" y="3328416"/>
-            <a:ext cx="9418320" cy="2980944"/>
+            <a:off x="1371600" y="3337560"/>
+            <a:ext cx="9418320" cy="2606040"/>
           </a:xfrm>
           <a:prstGeom prst="rect">
             <a:avLst/>
@@ -4534,10 +4470,6 @@
           </a:solidFill>
           <a:ln/>
         </p:spPr>
-        <p:txBody>
-          <a:bodyPr/>
-          <a:p/>
-        </p:txBody>
       </p:sp>
       <p:sp>
         <p:nvSpPr>
@@ -5726,10 +5658,6 @@
           </a:solidFill>
           <a:ln/>
         </p:spPr>
-        <p:txBody>
-          <a:bodyPr/>
-          <a:p/>
-        </p:txBody>
       </p:sp>
       <p:sp>
         <p:nvSpPr>
@@ -5792,10 +5720,6 @@
           </a:solidFill>
           <a:ln/>
         </p:spPr>
-        <p:txBody>
-          <a:bodyPr/>
-          <a:p/>
-        </p:txBody>
       </p:sp>
       <p:sp>
         <p:nvSpPr>
@@ -5926,10 +5850,6 @@
           </a:solidFill>
           <a:ln/>
         </p:spPr>
-        <p:txBody>
-          <a:bodyPr/>
-          <a:p/>
-        </p:txBody>
       </p:sp>
       <p:sp>
         <p:nvSpPr>
@@ -6067,10 +5987,6 @@
           </a:solidFill>
           <a:ln/>
         </p:spPr>
-        <p:txBody>
-          <a:bodyPr/>
-          <a:p/>
-        </p:txBody>
       </p:sp>
       <p:sp>
         <p:nvSpPr>
@@ -6208,10 +6124,6 @@
           </a:solidFill>
           <a:ln/>
         </p:spPr>
-        <p:txBody>
-          <a:bodyPr/>
-          <a:p/>
-        </p:txBody>
       </p:sp>
       <p:sp>
         <p:nvSpPr>
@@ -6349,10 +6261,6 @@
           </a:solidFill>
           <a:ln/>
         </p:spPr>
-        <p:txBody>
-          <a:bodyPr/>
-          <a:p/>
-        </p:txBody>
       </p:sp>
       <p:sp>
         <p:nvSpPr>
@@ -6490,10 +6398,6 @@
           </a:solidFill>
           <a:ln/>
         </p:spPr>
-        <p:txBody>
-          <a:bodyPr/>
-          <a:p/>
-        </p:txBody>
       </p:sp>
       <p:sp>
         <p:nvSpPr>
@@ -6631,10 +6535,6 @@
           </a:solidFill>
           <a:ln/>
         </p:spPr>
-        <p:txBody>
-          <a:bodyPr/>
-          <a:p/>
-        </p:txBody>
       </p:sp>
       <p:sp>
         <p:nvSpPr>
@@ -6772,10 +6672,6 @@
           </a:solidFill>
           <a:ln/>
         </p:spPr>
-        <p:txBody>
-          <a:bodyPr/>
-          <a:p/>
-        </p:txBody>
       </p:sp>
       <p:sp>
         <p:nvSpPr>
@@ -6796,10 +6692,6 @@
           </a:solidFill>
           <a:ln/>
         </p:spPr>
-        <p:txBody>
-          <a:bodyPr/>
-          <a:p/>
-        </p:txBody>
       </p:sp>
       <p:sp>
         <p:nvSpPr>
@@ -6930,10 +6822,6 @@
           </a:solidFill>
           <a:ln/>
         </p:spPr>
-        <p:txBody>
-          <a:bodyPr/>
-          <a:p/>
-        </p:txBody>
       </p:sp>
       <p:sp>
         <p:nvSpPr>
@@ -7074,10 +6962,6 @@
           </a:solidFill>
           <a:ln/>
         </p:spPr>
-        <p:txBody>
-          <a:bodyPr/>
-          <a:p/>
-        </p:txBody>
       </p:sp>
       <p:sp>
         <p:nvSpPr>
@@ -7208,10 +7092,6 @@
           </a:solidFill>
           <a:ln/>
         </p:spPr>
-        <p:txBody>
-          <a:bodyPr/>
-          <a:p/>
-        </p:txBody>
       </p:sp>
       <p:sp>
         <p:nvSpPr>
@@ -7327,7 +7207,7 @@
                 <a:ea typeface="Calibri" pitchFamily="34" charset="-122"/>
                 <a:cs typeface="Calibri" pitchFamily="34" charset="-120"/>
               </a:rPr>
-              <a:t>{{website_narrative}}</a:t>
+              <a:t>{{engagement_narrative}}</a:t>
             </a:r>
             <a:endParaRPr lang="en-US" sz="1200" dirty="0"/>
           </a:p>
@@ -7352,10 +7232,6 @@
           </a:solidFill>
           <a:ln/>
         </p:spPr>
-        <p:txBody>
-          <a:bodyPr/>
-          <a:p/>
-        </p:txBody>
       </p:sp>
       <p:sp>
         <p:nvSpPr>
@@ -7486,10 +7362,6 @@
           </a:solidFill>
           <a:ln/>
         </p:spPr>
-        <p:txBody>
-          <a:bodyPr/>
-          <a:p/>
-        </p:txBody>
       </p:sp>
       <p:sp>
         <p:nvSpPr>
@@ -7630,10 +7502,6 @@
           </a:solidFill>
           <a:ln/>
         </p:spPr>
-        <p:txBody>
-          <a:bodyPr/>
-          <a:p/>
-        </p:txBody>
       </p:sp>
       <p:sp>
         <p:nvSpPr>
@@ -7764,10 +7632,6 @@
           </a:solidFill>
           <a:ln/>
         </p:spPr>
-        <p:txBody>
-          <a:bodyPr/>
-          <a:p/>
-        </p:txBody>
       </p:sp>
       <p:sp>
         <p:nvSpPr>
@@ -7869,10 +7733,6 @@
           </a:solidFill>
           <a:ln/>
         </p:spPr>
-        <p:txBody>
-          <a:bodyPr/>
-          <a:p/>
-        </p:txBody>
       </p:sp>
       <p:sp>
         <p:nvSpPr>
@@ -8003,10 +7863,6 @@
           </a:solidFill>
           <a:ln/>
         </p:spPr>
-        <p:txBody>
-          <a:bodyPr/>
-          <a:p/>
-        </p:txBody>
       </p:sp>
       <p:sp>
         <p:nvSpPr>
@@ -8147,10 +8003,6 @@
           </a:solidFill>
           <a:ln/>
         </p:spPr>
-        <p:txBody>
-          <a:bodyPr/>
-          <a:p/>
-        </p:txBody>
       </p:sp>
       <p:sp>
         <p:nvSpPr>
@@ -8281,10 +8133,6 @@
           </a:solidFill>
           <a:ln/>
         </p:spPr>
-        <p:txBody>
-          <a:bodyPr/>
-          <a:p/>
-        </p:txBody>
       </p:sp>
       <p:sp>
         <p:nvSpPr>
@@ -8425,10 +8273,6 @@
           </a:solidFill>
           <a:ln/>
         </p:spPr>
-        <p:txBody>
-          <a:bodyPr/>
-          <a:p/>
-        </p:txBody>
       </p:sp>
       <p:sp>
         <p:nvSpPr>

--- a/backend/templates/pptx/minimal_elegant.pptx
+++ b/backend/templates/pptx/minimal_elegant.pptx
@@ -2479,84 +2479,6 @@
       </p:grpSpPr>
       <p:sp>
         <p:nvSpPr>
-          <p:cNvPr id="2" name="Text 0"/>
-          <p:cNvSpPr/>
-          <p:nvPr/>
-        </p:nvSpPr>
-        <p:spPr>
-          <a:xfrm>
-            <a:off x="1371600" y="731520"/>
-            <a:ext cx="1828800" cy="731520"/>
-          </a:xfrm>
-          <a:prstGeom prst="rect">
-            <a:avLst/>
-          </a:prstGeom>
-          <a:noFill/>
-          <a:ln/>
-        </p:spPr>
-        <p:txBody>
-          <a:bodyPr wrap="square" rtlCol="0" anchor="ctr"/>
-          <a:lstStyle/>
-          <a:p>
-            <a:pPr algn="l" indent="0" marL="0">
-              <a:buNone/>
-            </a:pPr>
-            <a:r>
-              <a:rPr lang="en-US" sz="900" dirty="0">
-                <a:solidFill>
-                  <a:srgbClr val="94A3B8"/>
-                </a:solidFill>
-                <a:latin typeface="Calibri" pitchFamily="34" charset="0"/>
-                <a:ea typeface="Calibri" pitchFamily="34" charset="-122"/>
-                <a:cs typeface="Calibri" pitchFamily="34" charset="-120"/>
-              </a:rPr>
-              <a:t>{{agency_logo}}</a:t>
-            </a:r>
-            <a:endParaRPr lang="en-US" sz="900" dirty="0"/>
-          </a:p>
-        </p:txBody>
-      </p:sp>
-      <p:sp>
-        <p:nvSpPr>
-          <p:cNvPr id="3" name="Text 1"/>
-          <p:cNvSpPr/>
-          <p:nvPr/>
-        </p:nvSpPr>
-        <p:spPr>
-          <a:xfrm>
-            <a:off x="1371600" y="2194560"/>
-            <a:ext cx="9418320" cy="1280160"/>
-          </a:xfrm>
-          <a:prstGeom prst="rect">
-            <a:avLst/>
-          </a:prstGeom>
-          <a:noFill/>
-          <a:ln/>
-        </p:spPr>
-        <p:txBody>
-          <a:bodyPr wrap="square" rtlCol="0" anchor="ctr"/>
-          <a:lstStyle/>
-          <a:p>
-            <a:pPr algn="ctr" indent="0" marL="0">
-              <a:buNone/>
-            </a:pPr>
-            <a:r>
-              <a:rPr lang="en-US" sz="4000" dirty="0">
-                <a:solidFill>
-                  <a:srgbClr val="0F172A"/>
-                </a:solidFill>
-                <a:latin typeface="Georgia" pitchFamily="34" charset="0"/>
-                <a:ea typeface="Georgia" pitchFamily="34" charset="-122"/>
-                <a:cs typeface="Georgia" pitchFamily="34" charset="-120"/>
-              </a:rPr>
-              <a:t>{{client_name}}</a:t>
-            </a:r>
-            <a:endParaRPr lang="en-US" sz="4000" dirty="0"/>
-          </a:p>
-        </p:txBody>
-      </p:sp>
-      <p:sp>
-        <p:nvSpPr>
           <p:cNvPr id="4" name="Shape 2"/>
           <p:cNvSpPr/>
           <p:nvPr/>
@@ -2574,161 +2496,9 @@
           </a:solidFill>
           <a:ln/>
         </p:spPr>
-      </p:sp>
-      <p:sp>
-        <p:nvSpPr>
-          <p:cNvPr id="5" name="Text 3"/>
-          <p:cNvSpPr/>
-          <p:nvPr/>
-        </p:nvSpPr>
-        <p:spPr>
-          <a:xfrm>
-            <a:off x="1371600" y="3931920"/>
-            <a:ext cx="9418320" cy="365760"/>
-          </a:xfrm>
-          <a:prstGeom prst="rect">
-            <a:avLst/>
-          </a:prstGeom>
-          <a:noFill/>
-          <a:ln/>
-        </p:spPr>
-        <p:txBody>
-          <a:bodyPr wrap="square" rtlCol="0" anchor="ctr"/>
-          <a:lstStyle/>
-          <a:p>
-            <a:pPr algn="ctr" indent="0" marL="0">
-              <a:buNone/>
-            </a:pPr>
-            <a:r>
-              <a:rPr lang="en-US" sz="1400" dirty="0">
-                <a:solidFill>
-                  <a:srgbClr val="64748B"/>
-                </a:solidFill>
-                <a:latin typeface="Calibri" pitchFamily="34" charset="0"/>
-                <a:ea typeface="Calibri" pitchFamily="34" charset="-122"/>
-                <a:cs typeface="Calibri" pitchFamily="34" charset="-120"/>
-              </a:rPr>
-              <a:t>{{report_period}}</a:t>
-            </a:r>
-            <a:endParaRPr lang="en-US" sz="1400" dirty="0"/>
-          </a:p>
-        </p:txBody>
-      </p:sp>
-      <p:sp>
-        <p:nvSpPr>
-          <p:cNvPr id="6" name="Text 4"/>
-          <p:cNvSpPr/>
-          <p:nvPr/>
-        </p:nvSpPr>
-        <p:spPr>
-          <a:xfrm>
-            <a:off x="1371600" y="4389120"/>
-            <a:ext cx="9418320" cy="320040"/>
-          </a:xfrm>
-          <a:prstGeom prst="rect">
-            <a:avLst/>
-          </a:prstGeom>
-          <a:noFill/>
-          <a:ln/>
-        </p:spPr>
-        <p:txBody>
-          <a:bodyPr wrap="square" rtlCol="0" anchor="ctr"/>
-          <a:lstStyle/>
-          <a:p>
-            <a:pPr algn="ctr" indent="0" marL="0">
-              <a:buNone/>
-            </a:pPr>
-            <a:r>
-              <a:rPr lang="en-US" sz="1100" dirty="0">
-                <a:solidFill>
-                  <a:srgbClr val="94A3B8"/>
-                </a:solidFill>
-                <a:latin typeface="Calibri" pitchFamily="34" charset="0"/>
-                <a:ea typeface="Calibri" pitchFamily="34" charset="-122"/>
-                <a:cs typeface="Calibri" pitchFamily="34" charset="-120"/>
-              </a:rPr>
-              <a:t>{{report_type}}</a:t>
-            </a:r>
-            <a:endParaRPr lang="en-US" sz="1100" dirty="0"/>
-          </a:p>
-        </p:txBody>
-      </p:sp>
-      <p:sp>
-        <p:nvSpPr>
-          <p:cNvPr id="7" name="Text 5"/>
-          <p:cNvSpPr/>
-          <p:nvPr/>
-        </p:nvSpPr>
-        <p:spPr>
-          <a:xfrm>
-            <a:off x="4937760" y="5029200"/>
-            <a:ext cx="2286000" cy="914400"/>
-          </a:xfrm>
-          <a:prstGeom prst="rect">
-            <a:avLst/>
-          </a:prstGeom>
-          <a:noFill/>
-          <a:ln/>
-        </p:spPr>
-        <p:txBody>
-          <a:bodyPr wrap="square" rtlCol="0" anchor="ctr"/>
-          <a:lstStyle/>
-          <a:p>
-            <a:pPr algn="ctr" indent="0" marL="0">
-              <a:buNone/>
-            </a:pPr>
-            <a:r>
-              <a:rPr lang="en-US" sz="900" dirty="0">
-                <a:solidFill>
-                  <a:srgbClr val="94A3B8"/>
-                </a:solidFill>
-                <a:latin typeface="Calibri" pitchFamily="34" charset="0"/>
-                <a:ea typeface="Calibri" pitchFamily="34" charset="-122"/>
-                <a:cs typeface="Calibri" pitchFamily="34" charset="-120"/>
-              </a:rPr>
-              <a:t>{{client_logo}}</a:t>
-            </a:r>
-            <a:endParaRPr lang="en-US" sz="900" dirty="0"/>
-          </a:p>
-        </p:txBody>
-      </p:sp>
-      <p:sp>
-        <p:nvSpPr>
-          <p:cNvPr id="8" name="Text 6"/>
-          <p:cNvSpPr/>
-          <p:nvPr/>
-        </p:nvSpPr>
-        <p:spPr>
-          <a:xfrm>
-            <a:off x="1371600" y="6309360"/>
-            <a:ext cx="9418320" cy="274320"/>
-          </a:xfrm>
-          <a:prstGeom prst="rect">
-            <a:avLst/>
-          </a:prstGeom>
-          <a:noFill/>
-          <a:ln/>
-        </p:spPr>
-        <p:txBody>
-          <a:bodyPr wrap="square" rtlCol="0" anchor="ctr"/>
-          <a:lstStyle/>
-          <a:p>
-            <a:pPr algn="ctr" indent="0" marL="0">
-              <a:buNone/>
-            </a:pPr>
-            <a:r>
-              <a:rPr lang="en-US" sz="900" dirty="0">
-                <a:solidFill>
-                  <a:srgbClr val="94A3B8"/>
-                </a:solidFill>
-                <a:latin typeface="Calibri" pitchFamily="34" charset="0"/>
-                <a:ea typeface="Calibri" pitchFamily="34" charset="-122"/>
-                <a:cs typeface="Calibri" pitchFamily="34" charset="-120"/>
-              </a:rPr>
-              <a:t>Prepared by {{agency_name}}</a:t>
-            </a:r>
-            <a:endParaRPr lang="en-US" sz="900" dirty="0"/>
-          </a:p>
+        <p:txBody>
+          <a:bodyPr/>
+          <a:p/>
         </p:txBody>
       </p:sp>
     </p:spTree>

--- a/backend/templates/pptx/minimal_elegant.pptx
+++ b/backend/templates/pptx/minimal_elegant.pptx
@@ -2486,19 +2486,62 @@
         <p:spPr>
           <a:xfrm>
             <a:off x="5166360" y="3657600"/>
-            <a:ext cx="1828800" cy="9144"/>
+            <a:ext cx="1828800" cy="36576"/>
           </a:xfrm>
           <a:prstGeom prst="rect">
             <a:avLst/>
           </a:prstGeom>
           <a:solidFill>
-            <a:srgbClr val="0F172A"/>
+            <a:srgbClr val="1E293B"/>
           </a:solidFill>
           <a:ln/>
         </p:spPr>
         <p:txBody>
           <a:bodyPr/>
           <a:p/>
+        </p:txBody>
+      </p:sp>
+      <p:sp>
+        <p:nvSpPr>
+          <p:cNvPr id="5" name="Rectangle 4"/>
+          <p:cNvSpPr/>
+          <p:nvPr/>
+        </p:nvSpPr>
+        <p:spPr>
+          <a:xfrm>
+            <a:off x="5166360" y="502920"/>
+            <a:ext cx="1828800" cy="36576"/>
+          </a:xfrm>
+          <a:prstGeom prst="rect">
+            <a:avLst/>
+          </a:prstGeom>
+          <a:solidFill>
+            <a:srgbClr val="1E293B"/>
+          </a:solidFill>
+          <a:ln>
+            <a:noFill/>
+          </a:ln>
+        </p:spPr>
+        <p:style>
+          <a:lnRef idx="1">
+            <a:schemeClr val="accent1"/>
+          </a:lnRef>
+          <a:fillRef idx="3">
+            <a:schemeClr val="accent1"/>
+          </a:fillRef>
+          <a:effectRef idx="2">
+            <a:schemeClr val="accent1"/>
+          </a:effectRef>
+          <a:fontRef idx="minor">
+            <a:schemeClr val="lt1"/>
+          </a:fontRef>
+        </p:style>
+        <p:txBody>
+          <a:bodyPr rtlCol="0" anchor="ctr"/>
+          <a:lstStyle/>
+          <a:p>
+            <a:pPr algn="ctr"/>
+          </a:p>
         </p:txBody>
       </p:sp>
     </p:spTree>
